--- a/오픈소스소프트웨어/2추자_3-1.클라우드컴퓨팅.pptx
+++ b/오픈소스소프트웨어/2추자_3-1.클라우드컴퓨팅.pptx
@@ -2381,6 +2381,13 @@
           </a:solidFill>
           <a:ln/>
         </p:spPr>
+        <p:txBody>
+          <a:bodyPr/>
+          <a:lstStyle/>
+          <a:p>
+            <a:endParaRPr lang="ko-KR" altLang="en-US"/>
+          </a:p>
+        </p:txBody>
       </p:sp>
       <p:sp>
         <p:nvSpPr>
@@ -2401,6 +2408,13 @@
           </a:solidFill>
           <a:ln/>
         </p:spPr>
+        <p:txBody>
+          <a:bodyPr/>
+          <a:lstStyle/>
+          <a:p>
+            <a:endParaRPr lang="ko-KR" altLang="en-US"/>
+          </a:p>
+        </p:txBody>
       </p:sp>
       <p:sp>
         <p:nvSpPr>
@@ -2421,6 +2435,13 @@
           </a:solidFill>
           <a:ln/>
         </p:spPr>
+        <p:txBody>
+          <a:bodyPr/>
+          <a:lstStyle/>
+          <a:p>
+            <a:endParaRPr lang="ko-KR" altLang="en-US"/>
+          </a:p>
+        </p:txBody>
       </p:sp>
       <p:sp>
         <p:nvSpPr>
@@ -2441,6 +2462,13 @@
           </a:solidFill>
           <a:ln/>
         </p:spPr>
+        <p:txBody>
+          <a:bodyPr/>
+          <a:lstStyle/>
+          <a:p>
+            <a:endParaRPr lang="ko-KR" altLang="en-US"/>
+          </a:p>
+        </p:txBody>
       </p:sp>
       <p:sp>
         <p:nvSpPr>
@@ -2461,6 +2489,13 @@
           </a:solidFill>
           <a:ln/>
         </p:spPr>
+        <p:txBody>
+          <a:bodyPr/>
+          <a:lstStyle/>
+          <a:p>
+            <a:endParaRPr lang="ko-KR" altLang="en-US"/>
+          </a:p>
+        </p:txBody>
       </p:sp>
       <p:sp>
         <p:nvSpPr>
@@ -2481,6 +2516,13 @@
           </a:solidFill>
           <a:ln/>
         </p:spPr>
+        <p:txBody>
+          <a:bodyPr/>
+          <a:lstStyle/>
+          <a:p>
+            <a:endParaRPr lang="ko-KR" altLang="en-US"/>
+          </a:p>
+        </p:txBody>
       </p:sp>
       <p:sp>
         <p:nvSpPr>
@@ -2503,6 +2545,13 @@
           </a:solidFill>
           <a:ln/>
         </p:spPr>
+        <p:txBody>
+          <a:bodyPr/>
+          <a:lstStyle/>
+          <a:p>
+            <a:endParaRPr lang="ko-KR" altLang="en-US"/>
+          </a:p>
+        </p:txBody>
       </p:sp>
       <p:sp>
         <p:nvSpPr>
@@ -2654,10 +2703,10 @@
                 <a:ea typeface="맑은 고딕" pitchFamily="34" charset="-122"/>
                 <a:cs typeface="맑은 고딕" pitchFamily="34" charset="-120"/>
               </a:rPr>
-              <a:t>클라우드란 무엇인가부터, </a:t>
-            </a:r>
-            <a:r>
-              <a:rPr lang="en-US" sz="1500" dirty="0" smtClean="0">
+              <a:t>클라우드란 무엇인가부터, AWS 계정을 </a:t>
+            </a:r>
+            <a:r>
+              <a:rPr lang="en-US" sz="1500" dirty="0" err="1">
                 <a:solidFill>
                   <a:srgbClr val="B7AFDA"/>
                 </a:solidFill>
@@ -2665,7 +2714,7 @@
                 <a:ea typeface="맑은 고딕" pitchFamily="34" charset="-122"/>
                 <a:cs typeface="맑은 고딕" pitchFamily="34" charset="-120"/>
               </a:rPr>
-              <a:t>AWS </a:t>
+              <a:t>만들고</a:t>
             </a:r>
             <a:r>
               <a:rPr lang="en-US" sz="1500" dirty="0">
@@ -2676,10 +2725,10 @@
                 <a:ea typeface="맑은 고딕" pitchFamily="34" charset="-122"/>
                 <a:cs typeface="맑은 고딕" pitchFamily="34" charset="-120"/>
               </a:rPr>
-              <a:t>계정을 </a:t>
-            </a:r>
-            <a:r>
-              <a:rPr lang="en-US" sz="1500" dirty="0" err="1">
+              <a:t> </a:t>
+            </a:r>
+            <a:r>
+              <a:rPr lang="ko-KR" altLang="en-US" sz="1500" dirty="0">
                 <a:solidFill>
                   <a:srgbClr val="B7AFDA"/>
                 </a:solidFill>
@@ -2687,7 +2736,7 @@
                 <a:ea typeface="맑은 고딕" pitchFamily="34" charset="-122"/>
                 <a:cs typeface="맑은 고딕" pitchFamily="34" charset="-120"/>
               </a:rPr>
-              <a:t>만들고</a:t>
+              <a:t>설정하는</a:t>
             </a:r>
             <a:r>
               <a:rPr lang="en-US" sz="1500" dirty="0">
@@ -2698,40 +2747,7 @@
                 <a:ea typeface="맑은 고딕" pitchFamily="34" charset="-122"/>
                 <a:cs typeface="맑은 고딕" pitchFamily="34" charset="-120"/>
               </a:rPr>
-              <a:t> </a:t>
-            </a:r>
-            <a:r>
-              <a:rPr lang="ko-KR" altLang="en-US" sz="1500" dirty="0" smtClean="0">
-                <a:solidFill>
-                  <a:srgbClr val="B7AFDA"/>
-                </a:solidFill>
-                <a:latin typeface="맑은 고딕" pitchFamily="34" charset="0"/>
-                <a:ea typeface="맑은 고딕" pitchFamily="34" charset="-122"/>
-                <a:cs typeface="맑은 고딕" pitchFamily="34" charset="-120"/>
-              </a:rPr>
-              <a:t>설정하는</a:t>
-            </a:r>
-            <a:r>
-              <a:rPr lang="en-US" sz="1500" dirty="0" smtClean="0">
-                <a:solidFill>
-                  <a:srgbClr val="B7AFDA"/>
-                </a:solidFill>
-                <a:latin typeface="맑은 고딕" pitchFamily="34" charset="0"/>
-                <a:ea typeface="맑은 고딕" pitchFamily="34" charset="-122"/>
-                <a:cs typeface="맑은 고딕" pitchFamily="34" charset="-120"/>
-              </a:rPr>
-              <a:t> </a:t>
-            </a:r>
-            <a:r>
-              <a:rPr lang="en-US" sz="1500" dirty="0">
-                <a:solidFill>
-                  <a:srgbClr val="B7AFDA"/>
-                </a:solidFill>
-                <a:latin typeface="맑은 고딕" pitchFamily="34" charset="0"/>
-                <a:ea typeface="맑은 고딕" pitchFamily="34" charset="-122"/>
-                <a:cs typeface="맑은 고딕" pitchFamily="34" charset="-120"/>
-              </a:rPr>
-              <a:t>법까지</a:t>
+              <a:t> 법까지</a:t>
             </a:r>
             <a:endParaRPr lang="en-US" sz="1500" dirty="0"/>
           </a:p>
@@ -2869,6 +2885,13 @@
           </a:solidFill>
           <a:ln/>
         </p:spPr>
+        <p:txBody>
+          <a:bodyPr/>
+          <a:lstStyle/>
+          <a:p>
+            <a:endParaRPr lang="ko-KR" altLang="en-US"/>
+          </a:p>
+        </p:txBody>
       </p:sp>
       <p:sp>
         <p:nvSpPr>
@@ -2928,6 +2951,13 @@
           </a:solidFill>
           <a:ln/>
         </p:spPr>
+        <p:txBody>
+          <a:bodyPr/>
+          <a:lstStyle/>
+          <a:p>
+            <a:endParaRPr lang="ko-KR" altLang="en-US"/>
+          </a:p>
+        </p:txBody>
       </p:sp>
       <p:sp>
         <p:nvSpPr>
@@ -3075,6 +3105,13 @@
             <a:prstDash val="solid"/>
           </a:ln>
         </p:spPr>
+        <p:txBody>
+          <a:bodyPr/>
+          <a:lstStyle/>
+          <a:p>
+            <a:endParaRPr lang="ko-KR" altLang="en-US"/>
+          </a:p>
+        </p:txBody>
       </p:sp>
       <p:sp>
         <p:nvSpPr>
@@ -3095,6 +3132,13 @@
           </a:solidFill>
           <a:ln/>
         </p:spPr>
+        <p:txBody>
+          <a:bodyPr/>
+          <a:lstStyle/>
+          <a:p>
+            <a:endParaRPr lang="ko-KR" altLang="en-US"/>
+          </a:p>
+        </p:txBody>
       </p:sp>
       <p:sp>
         <p:nvSpPr>
@@ -3115,6 +3159,13 @@
           </a:solidFill>
           <a:ln/>
         </p:spPr>
+        <p:txBody>
+          <a:bodyPr/>
+          <a:lstStyle/>
+          <a:p>
+            <a:endParaRPr lang="ko-KR" altLang="en-US"/>
+          </a:p>
+        </p:txBody>
       </p:sp>
       <p:sp>
         <p:nvSpPr>
@@ -3135,6 +3186,13 @@
           </a:solidFill>
           <a:ln/>
         </p:spPr>
+        <p:txBody>
+          <a:bodyPr/>
+          <a:lstStyle/>
+          <a:p>
+            <a:endParaRPr lang="ko-KR" altLang="en-US"/>
+          </a:p>
+        </p:txBody>
       </p:sp>
       <p:sp>
         <p:nvSpPr>
@@ -3200,7 +3258,7 @@
               <a:buNone/>
             </a:pPr>
             <a:r>
-              <a:rPr lang="en-US" sz="900" dirty="0" smtClean="0">
+              <a:rPr lang="en-US" sz="900" dirty="0">
                 <a:solidFill>
                   <a:srgbClr val="6E6690"/>
                 </a:solidFill>
@@ -3291,6 +3349,13 @@
           </a:solidFill>
           <a:ln/>
         </p:spPr>
+        <p:txBody>
+          <a:bodyPr/>
+          <a:lstStyle/>
+          <a:p>
+            <a:endParaRPr lang="ko-KR" altLang="en-US"/>
+          </a:p>
+        </p:txBody>
       </p:sp>
       <p:sp>
         <p:nvSpPr>
@@ -3350,6 +3415,13 @@
           </a:solidFill>
           <a:ln/>
         </p:spPr>
+        <p:txBody>
+          <a:bodyPr/>
+          <a:lstStyle/>
+          <a:p>
+            <a:endParaRPr lang="ko-KR" altLang="en-US"/>
+          </a:p>
+        </p:txBody>
       </p:sp>
       <p:sp>
         <p:nvSpPr>
@@ -3486,10 +3558,32 @@
                 <a:ea typeface="맑은 고딕" pitchFamily="34" charset="-122"/>
                 <a:cs typeface="맑은 고딕" pitchFamily="34" charset="-120"/>
               </a:rPr>
+              <a:t> “</a:t>
+            </a:r>
+            <a:r>
+              <a:rPr lang="en-US" sz="1250" dirty="0" err="1">
+                <a:solidFill>
+                  <a:srgbClr val="1C1633"/>
+                </a:solidFill>
+                <a:latin typeface="맑은 고딕" pitchFamily="34" charset="0"/>
+                <a:ea typeface="맑은 고딕" pitchFamily="34" charset="-122"/>
+                <a:cs typeface="맑은 고딕" pitchFamily="34" charset="-120"/>
+              </a:rPr>
+              <a:t>루트</a:t>
+            </a:r>
+            <a:r>
+              <a:rPr lang="en-US" sz="1250" dirty="0">
+                <a:solidFill>
+                  <a:srgbClr val="1C1633"/>
+                </a:solidFill>
+                <a:latin typeface="맑은 고딕" pitchFamily="34" charset="0"/>
+                <a:ea typeface="맑은 고딕" pitchFamily="34" charset="-122"/>
+                <a:cs typeface="맑은 고딕" pitchFamily="34" charset="-120"/>
+              </a:rPr>
               <a:t> </a:t>
             </a:r>
             <a:r>
-              <a:rPr lang="en-US" sz="1250" dirty="0" smtClean="0">
+              <a:rPr lang="en-US" sz="1250" dirty="0" err="1">
                 <a:solidFill>
                   <a:srgbClr val="1C1633"/>
                 </a:solidFill>
@@ -3497,10 +3591,10 @@
                 <a:ea typeface="맑은 고딕" pitchFamily="34" charset="-122"/>
                 <a:cs typeface="맑은 고딕" pitchFamily="34" charset="-120"/>
               </a:rPr>
-              <a:t>“</a:t>
-            </a:r>
-            <a:r>
-              <a:rPr lang="en-US" sz="1250" dirty="0" err="1" smtClean="0">
+              <a:t>사용자</a:t>
+            </a:r>
+            <a:r>
+              <a:rPr lang="en-US" sz="1250" dirty="0">
                 <a:solidFill>
                   <a:srgbClr val="1C1633"/>
                 </a:solidFill>
@@ -3508,10 +3602,10 @@
                 <a:ea typeface="맑은 고딕" pitchFamily="34" charset="-122"/>
                 <a:cs typeface="맑은 고딕" pitchFamily="34" charset="-120"/>
               </a:rPr>
-              <a:t>루트</a:t>
-            </a:r>
-            <a:r>
-              <a:rPr lang="en-US" sz="1250" dirty="0" smtClean="0">
+              <a:t>” 비밀번호를 설정합니다. 이 비밀번호는 </a:t>
+            </a:r>
+            <a:r>
+              <a:rPr lang="en-US" sz="1250" dirty="0" err="1">
                 <a:solidFill>
                   <a:srgbClr val="1C1633"/>
                 </a:solidFill>
@@ -3519,10 +3613,10 @@
                 <a:ea typeface="맑은 고딕" pitchFamily="34" charset="-122"/>
                 <a:cs typeface="맑은 고딕" pitchFamily="34" charset="-120"/>
               </a:rPr>
-              <a:t> </a:t>
-            </a:r>
-            <a:r>
-              <a:rPr lang="en-US" sz="1250" dirty="0" err="1" smtClean="0">
+              <a:t>이후</a:t>
+            </a:r>
+            <a:r>
+              <a:rPr lang="en-US" sz="1250" dirty="0">
                 <a:solidFill>
                   <a:srgbClr val="1C1633"/>
                 </a:solidFill>
@@ -3530,10 +3624,14 @@
                 <a:ea typeface="맑은 고딕" pitchFamily="34" charset="-122"/>
                 <a:cs typeface="맑은 고딕" pitchFamily="34" charset="-120"/>
               </a:rPr>
-              <a:t>사용자</a:t>
-            </a:r>
-            <a:r>
-              <a:rPr lang="en-US" sz="1250" dirty="0" smtClean="0">
+              <a:t> IAM(</a:t>
+            </a:r>
+            <a:r>
+              <a:rPr lang="en-US" altLang="ko-KR" sz="1400" dirty="0"/>
+              <a:t>Identity and Access Management)</a:t>
+            </a:r>
+            <a:r>
+              <a:rPr lang="en-US" sz="1250" dirty="0">
                 <a:solidFill>
                   <a:srgbClr val="1C1633"/>
                 </a:solidFill>
@@ -3541,81 +3639,7 @@
                 <a:ea typeface="맑은 고딕" pitchFamily="34" charset="-122"/>
                 <a:cs typeface="맑은 고딕" pitchFamily="34" charset="-120"/>
               </a:rPr>
-              <a:t>” </a:t>
-            </a:r>
-            <a:r>
-              <a:rPr lang="en-US" sz="1250" dirty="0">
-                <a:solidFill>
-                  <a:srgbClr val="1C1633"/>
-                </a:solidFill>
-                <a:latin typeface="맑은 고딕" pitchFamily="34" charset="0"/>
-                <a:ea typeface="맑은 고딕" pitchFamily="34" charset="-122"/>
-                <a:cs typeface="맑은 고딕" pitchFamily="34" charset="-120"/>
-              </a:rPr>
-              <a:t>비밀번호를 설정합니다. 이 비밀번호는 </a:t>
-            </a:r>
-            <a:r>
-              <a:rPr lang="en-US" sz="1250" dirty="0" err="1">
-                <a:solidFill>
-                  <a:srgbClr val="1C1633"/>
-                </a:solidFill>
-                <a:latin typeface="맑은 고딕" pitchFamily="34" charset="0"/>
-                <a:ea typeface="맑은 고딕" pitchFamily="34" charset="-122"/>
-                <a:cs typeface="맑은 고딕" pitchFamily="34" charset="-120"/>
-              </a:rPr>
-              <a:t>이후</a:t>
-            </a:r>
-            <a:r>
-              <a:rPr lang="en-US" sz="1250" dirty="0">
-                <a:solidFill>
-                  <a:srgbClr val="1C1633"/>
-                </a:solidFill>
-                <a:latin typeface="맑은 고딕" pitchFamily="34" charset="0"/>
-                <a:ea typeface="맑은 고딕" pitchFamily="34" charset="-122"/>
-                <a:cs typeface="맑은 고딕" pitchFamily="34" charset="-120"/>
-              </a:rPr>
-              <a:t> </a:t>
-            </a:r>
-            <a:r>
-              <a:rPr lang="en-US" sz="1250" dirty="0" smtClean="0">
-                <a:solidFill>
-                  <a:srgbClr val="1C1633"/>
-                </a:solidFill>
-                <a:latin typeface="맑은 고딕" pitchFamily="34" charset="0"/>
-                <a:ea typeface="맑은 고딕" pitchFamily="34" charset="-122"/>
-                <a:cs typeface="맑은 고딕" pitchFamily="34" charset="-120"/>
-              </a:rPr>
-              <a:t>IAM(</a:t>
-            </a:r>
-            <a:r>
-              <a:rPr lang="en-US" altLang="ko-KR" sz="1400" dirty="0"/>
-              <a:t>Identity and Access </a:t>
-            </a:r>
-            <a:r>
-              <a:rPr lang="en-US" altLang="ko-KR" sz="1400" dirty="0" smtClean="0"/>
-              <a:t>Management)</a:t>
-            </a:r>
-            <a:r>
-              <a:rPr lang="en-US" sz="1250" dirty="0" smtClean="0">
-                <a:solidFill>
-                  <a:srgbClr val="1C1633"/>
-                </a:solidFill>
-                <a:latin typeface="맑은 고딕" pitchFamily="34" charset="0"/>
-                <a:ea typeface="맑은 고딕" pitchFamily="34" charset="-122"/>
-                <a:cs typeface="맑은 고딕" pitchFamily="34" charset="-120"/>
-              </a:rPr>
-              <a:t> </a:t>
-            </a:r>
-            <a:r>
-              <a:rPr lang="en-US" sz="1250" dirty="0">
-                <a:solidFill>
-                  <a:srgbClr val="1C1633"/>
-                </a:solidFill>
-                <a:latin typeface="맑은 고딕" pitchFamily="34" charset="0"/>
-                <a:ea typeface="맑은 고딕" pitchFamily="34" charset="-122"/>
-                <a:cs typeface="맑은 고딕" pitchFamily="34" charset="-120"/>
-              </a:rPr>
-              <a:t>사용자로 전환하기 전까지 계정 전체에 대한 접근 권한을 가지므로 각별히 안전하게 관리해야 합니다.</a:t>
+              <a:t> 사용자로 전환하기 전까지 계정 전체에 대한 접근 권한을 가지므로 각별히 안전하게 관리해야 합니다.</a:t>
             </a:r>
             <a:endParaRPr lang="en-US" sz="1250" dirty="0"/>
           </a:p>
@@ -3647,6 +3671,13 @@
             <a:prstDash val="solid"/>
           </a:ln>
         </p:spPr>
+        <p:txBody>
+          <a:bodyPr/>
+          <a:lstStyle/>
+          <a:p>
+            <a:endParaRPr lang="ko-KR" altLang="en-US"/>
+          </a:p>
+        </p:txBody>
       </p:sp>
       <p:sp>
         <p:nvSpPr>
@@ -3667,6 +3698,13 @@
           </a:solidFill>
           <a:ln/>
         </p:spPr>
+        <p:txBody>
+          <a:bodyPr/>
+          <a:lstStyle/>
+          <a:p>
+            <a:endParaRPr lang="ko-KR" altLang="en-US"/>
+          </a:p>
+        </p:txBody>
       </p:sp>
       <p:sp>
         <p:nvSpPr>
@@ -3687,6 +3725,13 @@
           </a:solidFill>
           <a:ln/>
         </p:spPr>
+        <p:txBody>
+          <a:bodyPr/>
+          <a:lstStyle/>
+          <a:p>
+            <a:endParaRPr lang="ko-KR" altLang="en-US"/>
+          </a:p>
+        </p:txBody>
       </p:sp>
       <p:sp>
         <p:nvSpPr>
@@ -3707,6 +3752,13 @@
           </a:solidFill>
           <a:ln/>
         </p:spPr>
+        <p:txBody>
+          <a:bodyPr/>
+          <a:lstStyle/>
+          <a:p>
+            <a:endParaRPr lang="ko-KR" altLang="en-US"/>
+          </a:p>
+        </p:txBody>
       </p:sp>
       <p:sp>
         <p:nvSpPr>
@@ -3772,7 +3824,7 @@
               <a:buNone/>
             </a:pPr>
             <a:r>
-              <a:rPr lang="en-US" sz="900" dirty="0" smtClean="0">
+              <a:rPr lang="en-US" sz="900" dirty="0">
                 <a:solidFill>
                   <a:srgbClr val="6E6690"/>
                 </a:solidFill>
@@ -3856,6 +3908,13 @@
           </a:solidFill>
           <a:ln/>
         </p:spPr>
+        <p:txBody>
+          <a:bodyPr/>
+          <a:lstStyle/>
+          <a:p>
+            <a:endParaRPr lang="ko-KR" altLang="en-US"/>
+          </a:p>
+        </p:txBody>
       </p:sp>
       <p:sp>
         <p:nvSpPr>
@@ -3915,6 +3974,13 @@
           </a:solidFill>
           <a:ln/>
         </p:spPr>
+        <p:txBody>
+          <a:bodyPr/>
+          <a:lstStyle/>
+          <a:p>
+            <a:endParaRPr lang="ko-KR" altLang="en-US"/>
+          </a:p>
+        </p:txBody>
       </p:sp>
       <p:sp>
         <p:nvSpPr>
@@ -3941,7 +4007,7 @@
               <a:buNone/>
             </a:pPr>
             <a:r>
-              <a:rPr lang="en-US" sz="1400" b="1" dirty="0" smtClean="0">
+              <a:rPr lang="en-US" sz="1400" b="1" dirty="0">
                 <a:solidFill>
                   <a:srgbClr val="FFFFFF"/>
                 </a:solidFill>
@@ -3980,7 +4046,7 @@
               <a:buNone/>
             </a:pPr>
             <a:r>
-              <a:rPr lang="ko-KR" altLang="en-US" sz="2700" b="1" dirty="0" smtClean="0">
+              <a:rPr lang="ko-KR" altLang="en-US" sz="2700" b="1" dirty="0">
                 <a:solidFill>
                   <a:srgbClr val="1C1633"/>
                 </a:solidFill>
@@ -4187,6 +4253,13 @@
             <a:prstDash val="solid"/>
           </a:ln>
         </p:spPr>
+        <p:txBody>
+          <a:bodyPr/>
+          <a:lstStyle/>
+          <a:p>
+            <a:endParaRPr lang="ko-KR" altLang="en-US"/>
+          </a:p>
+        </p:txBody>
       </p:sp>
       <p:sp>
         <p:nvSpPr>
@@ -4207,6 +4280,13 @@
           </a:solidFill>
           <a:ln/>
         </p:spPr>
+        <p:txBody>
+          <a:bodyPr/>
+          <a:lstStyle/>
+          <a:p>
+            <a:endParaRPr lang="ko-KR" altLang="en-US"/>
+          </a:p>
+        </p:txBody>
       </p:sp>
       <p:sp>
         <p:nvSpPr>
@@ -4227,6 +4307,13 @@
           </a:solidFill>
           <a:ln/>
         </p:spPr>
+        <p:txBody>
+          <a:bodyPr/>
+          <a:lstStyle/>
+          <a:p>
+            <a:endParaRPr lang="ko-KR" altLang="en-US"/>
+          </a:p>
+        </p:txBody>
       </p:sp>
       <p:sp>
         <p:nvSpPr>
@@ -4247,6 +4334,13 @@
           </a:solidFill>
           <a:ln/>
         </p:spPr>
+        <p:txBody>
+          <a:bodyPr/>
+          <a:lstStyle/>
+          <a:p>
+            <a:endParaRPr lang="ko-KR" altLang="en-US"/>
+          </a:p>
+        </p:txBody>
       </p:sp>
       <p:sp>
         <p:nvSpPr>
@@ -4312,7 +4406,7 @@
               <a:buNone/>
             </a:pPr>
             <a:r>
-              <a:rPr lang="en-US" sz="900" dirty="0" smtClean="0">
+              <a:rPr lang="en-US" sz="900" dirty="0">
                 <a:solidFill>
                   <a:srgbClr val="6E6690"/>
                 </a:solidFill>
@@ -4516,6 +4610,13 @@
           </a:solidFill>
           <a:ln/>
         </p:spPr>
+        <p:txBody>
+          <a:bodyPr/>
+          <a:lstStyle/>
+          <a:p>
+            <a:endParaRPr lang="ko-KR" altLang="en-US"/>
+          </a:p>
+        </p:txBody>
       </p:sp>
       <p:sp>
         <p:nvSpPr>
@@ -4575,6 +4676,13 @@
           </a:solidFill>
           <a:ln/>
         </p:spPr>
+        <p:txBody>
+          <a:bodyPr/>
+          <a:lstStyle/>
+          <a:p>
+            <a:endParaRPr lang="ko-KR" altLang="en-US"/>
+          </a:p>
+        </p:txBody>
       </p:sp>
       <p:sp>
         <p:nvSpPr>
@@ -4601,7 +4709,7 @@
               <a:buNone/>
             </a:pPr>
             <a:r>
-              <a:rPr lang="en-US" sz="1400" b="1" dirty="0" smtClean="0">
+              <a:rPr lang="en-US" sz="1400" b="1" dirty="0">
                 <a:solidFill>
                   <a:srgbClr val="FFFFFF"/>
                 </a:solidFill>
@@ -5018,6 +5126,13 @@
             <a:prstDash val="solid"/>
           </a:ln>
         </p:spPr>
+        <p:txBody>
+          <a:bodyPr/>
+          <a:lstStyle/>
+          <a:p>
+            <a:endParaRPr lang="ko-KR" altLang="en-US"/>
+          </a:p>
+        </p:txBody>
       </p:sp>
       <p:sp>
         <p:nvSpPr>
@@ -5038,6 +5153,13 @@
           </a:solidFill>
           <a:ln/>
         </p:spPr>
+        <p:txBody>
+          <a:bodyPr/>
+          <a:lstStyle/>
+          <a:p>
+            <a:endParaRPr lang="ko-KR" altLang="en-US"/>
+          </a:p>
+        </p:txBody>
       </p:sp>
       <p:sp>
         <p:nvSpPr>
@@ -5058,6 +5180,13 @@
           </a:solidFill>
           <a:ln/>
         </p:spPr>
+        <p:txBody>
+          <a:bodyPr/>
+          <a:lstStyle/>
+          <a:p>
+            <a:endParaRPr lang="ko-KR" altLang="en-US"/>
+          </a:p>
+        </p:txBody>
       </p:sp>
       <p:sp>
         <p:nvSpPr>
@@ -5078,6 +5207,13 @@
           </a:solidFill>
           <a:ln/>
         </p:spPr>
+        <p:txBody>
+          <a:bodyPr/>
+          <a:lstStyle/>
+          <a:p>
+            <a:endParaRPr lang="ko-KR" altLang="en-US"/>
+          </a:p>
+        </p:txBody>
       </p:sp>
       <p:sp>
         <p:nvSpPr>
@@ -5105,6 +5241,13 @@
             <a:prstDash val="solid"/>
           </a:ln>
         </p:spPr>
+        <p:txBody>
+          <a:bodyPr/>
+          <a:lstStyle/>
+          <a:p>
+            <a:endParaRPr lang="ko-KR" altLang="en-US"/>
+          </a:p>
+        </p:txBody>
       </p:sp>
       <p:sp>
         <p:nvSpPr>
@@ -5125,6 +5268,13 @@
           </a:solidFill>
           <a:ln/>
         </p:spPr>
+        <p:txBody>
+          <a:bodyPr/>
+          <a:lstStyle/>
+          <a:p>
+            <a:endParaRPr lang="ko-KR" altLang="en-US"/>
+          </a:p>
+        </p:txBody>
       </p:sp>
       <p:sp>
         <p:nvSpPr>
@@ -5145,6 +5295,13 @@
           </a:solidFill>
           <a:ln/>
         </p:spPr>
+        <p:txBody>
+          <a:bodyPr/>
+          <a:lstStyle/>
+          <a:p>
+            <a:endParaRPr lang="ko-KR" altLang="en-US"/>
+          </a:p>
+        </p:txBody>
       </p:sp>
       <p:sp>
         <p:nvSpPr>
@@ -5165,6 +5322,13 @@
           </a:solidFill>
           <a:ln/>
         </p:spPr>
+        <p:txBody>
+          <a:bodyPr/>
+          <a:lstStyle/>
+          <a:p>
+            <a:endParaRPr lang="ko-KR" altLang="en-US"/>
+          </a:p>
+        </p:txBody>
       </p:sp>
       <p:sp>
         <p:nvSpPr>
@@ -5230,7 +5394,7 @@
               <a:buNone/>
             </a:pPr>
             <a:r>
-              <a:rPr lang="en-US" sz="900" dirty="0" smtClean="0">
+              <a:rPr lang="en-US" sz="900" dirty="0">
                 <a:solidFill>
                   <a:srgbClr val="6E6690"/>
                 </a:solidFill>
@@ -5346,6 +5510,13 @@
           </a:solidFill>
           <a:ln/>
         </p:spPr>
+        <p:txBody>
+          <a:bodyPr/>
+          <a:lstStyle/>
+          <a:p>
+            <a:endParaRPr lang="ko-KR" altLang="en-US"/>
+          </a:p>
+        </p:txBody>
       </p:sp>
       <p:sp>
         <p:nvSpPr>
@@ -5405,6 +5576,13 @@
           </a:solidFill>
           <a:ln/>
         </p:spPr>
+        <p:txBody>
+          <a:bodyPr/>
+          <a:lstStyle/>
+          <a:p>
+            <a:endParaRPr lang="ko-KR" altLang="en-US"/>
+          </a:p>
+        </p:txBody>
       </p:sp>
       <p:sp>
         <p:nvSpPr>
@@ -5431,7 +5609,7 @@
               <a:buNone/>
             </a:pPr>
             <a:r>
-              <a:rPr lang="en-US" sz="1400" b="1" dirty="0" smtClean="0">
+              <a:rPr lang="en-US" sz="1400" b="1" dirty="0">
                 <a:solidFill>
                   <a:srgbClr val="FFFFFF"/>
                 </a:solidFill>
@@ -5505,6 +5683,13 @@
           </a:solidFill>
           <a:ln/>
         </p:spPr>
+        <p:txBody>
+          <a:bodyPr/>
+          <a:lstStyle/>
+          <a:p>
+            <a:endParaRPr lang="ko-KR" altLang="en-US"/>
+          </a:p>
+        </p:txBody>
       </p:sp>
       <p:sp>
         <p:nvSpPr>
@@ -5648,7 +5833,7 @@
               <a:t> </a:t>
             </a:r>
             <a:r>
-              <a:rPr lang="en-US" sz="1150" dirty="0" err="1" smtClean="0">
+              <a:rPr lang="en-US" sz="1150" dirty="0" err="1">
                 <a:solidFill>
                   <a:srgbClr val="1C1633"/>
                 </a:solidFill>
@@ -5670,7 +5855,7 @@
               <a:t>, </a:t>
             </a:r>
             <a:r>
-              <a:rPr lang="en-US" sz="1150" dirty="0" err="1" smtClean="0">
+              <a:rPr lang="en-US" sz="1150" dirty="0" err="1">
                 <a:solidFill>
                   <a:srgbClr val="1C1633"/>
                 </a:solidFill>
@@ -5681,7 +5866,7 @@
               <a:t>자동으로</a:t>
             </a:r>
             <a:r>
-              <a:rPr lang="en-US" sz="1150" dirty="0" smtClean="0">
+              <a:rPr lang="en-US" sz="1150" dirty="0">
                 <a:solidFill>
                   <a:srgbClr val="1C1633"/>
                 </a:solidFill>
@@ -5689,18 +5874,7 @@
                 <a:ea typeface="맑은 고딕" pitchFamily="34" charset="-122"/>
                 <a:cs typeface="맑은 고딕" pitchFamily="34" charset="-120"/>
               </a:rPr>
-              <a:t> </a:t>
-            </a:r>
-            <a:r>
-              <a:rPr lang="en-US" sz="1150" dirty="0">
-                <a:solidFill>
-                  <a:srgbClr val="1C1633"/>
-                </a:solidFill>
-                <a:latin typeface="맑은 고딕" pitchFamily="34" charset="0"/>
-                <a:ea typeface="맑은 고딕" pitchFamily="34" charset="-122"/>
-                <a:cs typeface="맑은 고딕" pitchFamily="34" charset="-120"/>
-              </a:rPr>
-              <a:t>취소됩니다.</a:t>
+              <a:t> 취소됩니다.</a:t>
             </a:r>
             <a:endParaRPr lang="en-US" sz="1150" dirty="0"/>
           </a:p>
@@ -5727,6 +5901,13 @@
           </a:solidFill>
           <a:ln/>
         </p:spPr>
+        <p:txBody>
+          <a:bodyPr/>
+          <a:lstStyle/>
+          <a:p>
+            <a:endParaRPr lang="ko-KR" altLang="en-US"/>
+          </a:p>
+        </p:txBody>
       </p:sp>
       <p:sp>
         <p:nvSpPr>
@@ -5806,10 +5987,10 @@
                 <a:ea typeface="맑은 고딕" pitchFamily="34" charset="-122"/>
                 <a:cs typeface="맑은 고딕" pitchFamily="34" charset="-120"/>
               </a:rPr>
-              <a:t> </a:t>
-            </a:r>
-            <a:r>
-              <a:rPr lang="en-US" sz="1050" dirty="0" smtClean="0">
+              <a:t> 100</a:t>
+            </a:r>
+            <a:r>
+              <a:rPr lang="ko-KR" altLang="en-US" sz="1050" dirty="0">
                 <a:solidFill>
                   <a:srgbClr val="1C1633"/>
                 </a:solidFill>
@@ -5817,10 +5998,10 @@
                 <a:ea typeface="맑은 고딕" pitchFamily="34" charset="-122"/>
                 <a:cs typeface="맑은 고딕" pitchFamily="34" charset="-120"/>
               </a:rPr>
-              <a:t>100</a:t>
-            </a:r>
-            <a:r>
-              <a:rPr lang="ko-KR" altLang="en-US" sz="1050" dirty="0" smtClean="0">
+              <a:t>원</a:t>
+            </a:r>
+            <a:r>
+              <a:rPr lang="en-US" sz="1050" dirty="0">
                 <a:solidFill>
                   <a:srgbClr val="1C1633"/>
                 </a:solidFill>
@@ -5828,29 +6009,7 @@
                 <a:ea typeface="맑은 고딕" pitchFamily="34" charset="-122"/>
                 <a:cs typeface="맑은 고딕" pitchFamily="34" charset="-120"/>
               </a:rPr>
-              <a:t>원</a:t>
-            </a:r>
-            <a:r>
-              <a:rPr lang="en-US" sz="1050" dirty="0" smtClean="0">
-                <a:solidFill>
-                  <a:srgbClr val="1C1633"/>
-                </a:solidFill>
-                <a:latin typeface="맑은 고딕" pitchFamily="34" charset="0"/>
-                <a:ea typeface="맑은 고딕" pitchFamily="34" charset="-122"/>
-                <a:cs typeface="맑은 고딕" pitchFamily="34" charset="-120"/>
-              </a:rPr>
-              <a:t>)</a:t>
-            </a:r>
-            <a:r>
-              <a:rPr lang="en-US" sz="1050" dirty="0">
-                <a:solidFill>
-                  <a:srgbClr val="1C1633"/>
-                </a:solidFill>
-                <a:latin typeface="맑은 고딕" pitchFamily="34" charset="0"/>
-                <a:ea typeface="맑은 고딕" pitchFamily="34" charset="-122"/>
-                <a:cs typeface="맑은 고딕" pitchFamily="34" charset="-120"/>
-              </a:rPr>
-              <a:t>를 결제 대기 상태로 걸어둡니다. 이 금액은 실제로 청구되지 않고 자동 취소됩니다.</a:t>
+              <a:t>)를 결제 대기 상태로 걸어둡니다. 이 금액은 실제로 청구되지 않고 자동 취소됩니다.</a:t>
             </a:r>
             <a:endParaRPr lang="en-US" sz="1050" dirty="0"/>
           </a:p>
@@ -5882,6 +6041,13 @@
             <a:prstDash val="solid"/>
           </a:ln>
         </p:spPr>
+        <p:txBody>
+          <a:bodyPr/>
+          <a:lstStyle/>
+          <a:p>
+            <a:endParaRPr lang="ko-KR" altLang="en-US"/>
+          </a:p>
+        </p:txBody>
       </p:sp>
       <p:sp>
         <p:nvSpPr>
@@ -5902,6 +6068,13 @@
           </a:solidFill>
           <a:ln/>
         </p:spPr>
+        <p:txBody>
+          <a:bodyPr/>
+          <a:lstStyle/>
+          <a:p>
+            <a:endParaRPr lang="ko-KR" altLang="en-US"/>
+          </a:p>
+        </p:txBody>
       </p:sp>
       <p:sp>
         <p:nvSpPr>
@@ -5922,6 +6095,13 @@
           </a:solidFill>
           <a:ln/>
         </p:spPr>
+        <p:txBody>
+          <a:bodyPr/>
+          <a:lstStyle/>
+          <a:p>
+            <a:endParaRPr lang="ko-KR" altLang="en-US"/>
+          </a:p>
+        </p:txBody>
       </p:sp>
       <p:sp>
         <p:nvSpPr>
@@ -5942,6 +6122,13 @@
           </a:solidFill>
           <a:ln/>
         </p:spPr>
+        <p:txBody>
+          <a:bodyPr/>
+          <a:lstStyle/>
+          <a:p>
+            <a:endParaRPr lang="ko-KR" altLang="en-US"/>
+          </a:p>
+        </p:txBody>
       </p:sp>
       <p:sp>
         <p:nvSpPr>
@@ -6007,7 +6194,7 @@
               <a:buNone/>
             </a:pPr>
             <a:r>
-              <a:rPr lang="en-US" sz="900" dirty="0" smtClean="0">
+              <a:rPr lang="en-US" sz="900" dirty="0">
                 <a:solidFill>
                   <a:srgbClr val="6E6690"/>
                 </a:solidFill>
@@ -6123,6 +6310,13 @@
           </a:solidFill>
           <a:ln/>
         </p:spPr>
+        <p:txBody>
+          <a:bodyPr/>
+          <a:lstStyle/>
+          <a:p>
+            <a:endParaRPr lang="ko-KR" altLang="en-US"/>
+          </a:p>
+        </p:txBody>
       </p:sp>
       <p:sp>
         <p:nvSpPr>
@@ -6182,6 +6376,13 @@
           </a:solidFill>
           <a:ln/>
         </p:spPr>
+        <p:txBody>
+          <a:bodyPr/>
+          <a:lstStyle/>
+          <a:p>
+            <a:endParaRPr lang="ko-KR" altLang="en-US"/>
+          </a:p>
+        </p:txBody>
       </p:sp>
       <p:sp>
         <p:nvSpPr>
@@ -6208,7 +6409,7 @@
               <a:buNone/>
             </a:pPr>
             <a:r>
-              <a:rPr lang="en-US" sz="1400" b="1" dirty="0" smtClean="0">
+              <a:rPr lang="en-US" sz="1400" b="1" dirty="0">
                 <a:solidFill>
                   <a:srgbClr val="FFFFFF"/>
                 </a:solidFill>
@@ -6329,6 +6530,13 @@
             <a:prstDash val="solid"/>
           </a:ln>
         </p:spPr>
+        <p:txBody>
+          <a:bodyPr/>
+          <a:lstStyle/>
+          <a:p>
+            <a:endParaRPr lang="ko-KR" altLang="en-US"/>
+          </a:p>
+        </p:txBody>
       </p:sp>
       <p:sp>
         <p:nvSpPr>
@@ -6349,6 +6557,13 @@
           </a:solidFill>
           <a:ln/>
         </p:spPr>
+        <p:txBody>
+          <a:bodyPr/>
+          <a:lstStyle/>
+          <a:p>
+            <a:endParaRPr lang="ko-KR" altLang="en-US"/>
+          </a:p>
+        </p:txBody>
       </p:sp>
       <p:sp>
         <p:nvSpPr>
@@ -6369,6 +6584,13 @@
           </a:solidFill>
           <a:ln/>
         </p:spPr>
+        <p:txBody>
+          <a:bodyPr/>
+          <a:lstStyle/>
+          <a:p>
+            <a:endParaRPr lang="ko-KR" altLang="en-US"/>
+          </a:p>
+        </p:txBody>
       </p:sp>
       <p:sp>
         <p:nvSpPr>
@@ -6389,6 +6611,13 @@
           </a:solidFill>
           <a:ln/>
         </p:spPr>
+        <p:txBody>
+          <a:bodyPr/>
+          <a:lstStyle/>
+          <a:p>
+            <a:endParaRPr lang="ko-KR" altLang="en-US"/>
+          </a:p>
+        </p:txBody>
       </p:sp>
       <p:pic>
         <p:nvPicPr>
@@ -6440,6 +6669,13 @@
             <a:prstDash val="solid"/>
           </a:ln>
         </p:spPr>
+        <p:txBody>
+          <a:bodyPr/>
+          <a:lstStyle/>
+          <a:p>
+            <a:endParaRPr lang="ko-KR" altLang="en-US"/>
+          </a:p>
+        </p:txBody>
       </p:sp>
       <p:sp>
         <p:nvSpPr>
@@ -6460,6 +6696,13 @@
           </a:solidFill>
           <a:ln/>
         </p:spPr>
+        <p:txBody>
+          <a:bodyPr/>
+          <a:lstStyle/>
+          <a:p>
+            <a:endParaRPr lang="ko-KR" altLang="en-US"/>
+          </a:p>
+        </p:txBody>
       </p:sp>
       <p:sp>
         <p:nvSpPr>
@@ -6480,6 +6723,13 @@
           </a:solidFill>
           <a:ln/>
         </p:spPr>
+        <p:txBody>
+          <a:bodyPr/>
+          <a:lstStyle/>
+          <a:p>
+            <a:endParaRPr lang="ko-KR" altLang="en-US"/>
+          </a:p>
+        </p:txBody>
       </p:sp>
       <p:sp>
         <p:nvSpPr>
@@ -6500,6 +6750,13 @@
           </a:solidFill>
           <a:ln/>
         </p:spPr>
+        <p:txBody>
+          <a:bodyPr/>
+          <a:lstStyle/>
+          <a:p>
+            <a:endParaRPr lang="ko-KR" altLang="en-US"/>
+          </a:p>
+        </p:txBody>
       </p:sp>
       <p:pic>
         <p:nvPicPr>
@@ -6589,7 +6846,7 @@
               <a:buNone/>
             </a:pPr>
             <a:r>
-              <a:rPr lang="en-US" sz="900" dirty="0" smtClean="0">
+              <a:rPr lang="en-US" sz="900" dirty="0">
                 <a:solidFill>
                   <a:srgbClr val="6E6690"/>
                 </a:solidFill>
@@ -6657,6 +6914,13 @@
           </a:solidFill>
           <a:ln/>
         </p:spPr>
+        <p:txBody>
+          <a:bodyPr/>
+          <a:lstStyle/>
+          <a:p>
+            <a:endParaRPr lang="ko-KR" altLang="en-US"/>
+          </a:p>
+        </p:txBody>
       </p:sp>
       <p:sp>
         <p:nvSpPr>
@@ -6716,6 +6980,13 @@
           </a:solidFill>
           <a:ln/>
         </p:spPr>
+        <p:txBody>
+          <a:bodyPr/>
+          <a:lstStyle/>
+          <a:p>
+            <a:endParaRPr lang="ko-KR" altLang="en-US"/>
+          </a:p>
+        </p:txBody>
       </p:sp>
       <p:sp>
         <p:nvSpPr>
@@ -6742,7 +7013,7 @@
               <a:buNone/>
             </a:pPr>
             <a:r>
-              <a:rPr lang="en-US" sz="1400" b="1" dirty="0" smtClean="0">
+              <a:rPr lang="en-US" sz="1400" b="1" dirty="0">
                 <a:solidFill>
                   <a:srgbClr val="FFFFFF"/>
                 </a:solidFill>
@@ -6844,7 +7115,7 @@
               <a:t>충분합니다</a:t>
             </a:r>
             <a:r>
-              <a:rPr lang="en-US" sz="1250" dirty="0" smtClean="0">
+              <a:rPr lang="en-US" sz="1250" dirty="0">
                 <a:solidFill>
                   <a:srgbClr val="1C1633"/>
                 </a:solidFill>
@@ -7126,6 +7397,13 @@
             <a:prstDash val="solid"/>
           </a:ln>
         </p:spPr>
+        <p:txBody>
+          <a:bodyPr/>
+          <a:lstStyle/>
+          <a:p>
+            <a:endParaRPr lang="ko-KR" altLang="en-US"/>
+          </a:p>
+        </p:txBody>
       </p:sp>
       <p:sp>
         <p:nvSpPr>
@@ -7146,6 +7424,13 @@
           </a:solidFill>
           <a:ln/>
         </p:spPr>
+        <p:txBody>
+          <a:bodyPr/>
+          <a:lstStyle/>
+          <a:p>
+            <a:endParaRPr lang="ko-KR" altLang="en-US"/>
+          </a:p>
+        </p:txBody>
       </p:sp>
       <p:sp>
         <p:nvSpPr>
@@ -7166,6 +7451,13 @@
           </a:solidFill>
           <a:ln/>
         </p:spPr>
+        <p:txBody>
+          <a:bodyPr/>
+          <a:lstStyle/>
+          <a:p>
+            <a:endParaRPr lang="ko-KR" altLang="en-US"/>
+          </a:p>
+        </p:txBody>
       </p:sp>
       <p:sp>
         <p:nvSpPr>
@@ -7186,6 +7478,13 @@
           </a:solidFill>
           <a:ln/>
         </p:spPr>
+        <p:txBody>
+          <a:bodyPr/>
+          <a:lstStyle/>
+          <a:p>
+            <a:endParaRPr lang="ko-KR" altLang="en-US"/>
+          </a:p>
+        </p:txBody>
       </p:sp>
       <p:sp>
         <p:nvSpPr>
@@ -7213,6 +7512,13 @@
             <a:prstDash val="solid"/>
           </a:ln>
         </p:spPr>
+        <p:txBody>
+          <a:bodyPr/>
+          <a:lstStyle/>
+          <a:p>
+            <a:endParaRPr lang="ko-KR" altLang="en-US"/>
+          </a:p>
+        </p:txBody>
       </p:sp>
       <p:sp>
         <p:nvSpPr>
@@ -7233,6 +7539,13 @@
           </a:solidFill>
           <a:ln/>
         </p:spPr>
+        <p:txBody>
+          <a:bodyPr/>
+          <a:lstStyle/>
+          <a:p>
+            <a:endParaRPr lang="ko-KR" altLang="en-US"/>
+          </a:p>
+        </p:txBody>
       </p:sp>
       <p:sp>
         <p:nvSpPr>
@@ -7253,6 +7566,13 @@
           </a:solidFill>
           <a:ln/>
         </p:spPr>
+        <p:txBody>
+          <a:bodyPr/>
+          <a:lstStyle/>
+          <a:p>
+            <a:endParaRPr lang="ko-KR" altLang="en-US"/>
+          </a:p>
+        </p:txBody>
       </p:sp>
       <p:sp>
         <p:nvSpPr>
@@ -7273,6 +7593,13 @@
           </a:solidFill>
           <a:ln/>
         </p:spPr>
+        <p:txBody>
+          <a:bodyPr/>
+          <a:lstStyle/>
+          <a:p>
+            <a:endParaRPr lang="ko-KR" altLang="en-US"/>
+          </a:p>
+        </p:txBody>
       </p:sp>
       <p:sp>
         <p:nvSpPr>
@@ -7338,7 +7665,7 @@
               <a:buNone/>
             </a:pPr>
             <a:r>
-              <a:rPr lang="en-US" sz="900" dirty="0" smtClean="0">
+              <a:rPr lang="en-US" sz="900" dirty="0">
                 <a:solidFill>
                   <a:srgbClr val="6E6690"/>
                 </a:solidFill>
@@ -7454,6 +7781,13 @@
           </a:solidFill>
           <a:ln/>
         </p:spPr>
+        <p:txBody>
+          <a:bodyPr/>
+          <a:lstStyle/>
+          <a:p>
+            <a:endParaRPr lang="ko-KR" altLang="en-US"/>
+          </a:p>
+        </p:txBody>
       </p:sp>
       <p:sp>
         <p:nvSpPr>
@@ -7513,6 +7847,13 @@
           </a:solidFill>
           <a:ln/>
         </p:spPr>
+        <p:txBody>
+          <a:bodyPr/>
+          <a:lstStyle/>
+          <a:p>
+            <a:endParaRPr lang="ko-KR" altLang="en-US"/>
+          </a:p>
+        </p:txBody>
       </p:sp>
       <p:sp>
         <p:nvSpPr>
@@ -7539,7 +7880,7 @@
               <a:buNone/>
             </a:pPr>
             <a:r>
-              <a:rPr lang="en-US" sz="1400" b="1" dirty="0" smtClean="0">
+              <a:rPr lang="en-US" sz="1400" b="1" dirty="0">
                 <a:solidFill>
                   <a:srgbClr val="FFFFFF"/>
                 </a:solidFill>
@@ -7641,7 +7982,7 @@
               <a:t>로그인합니다</a:t>
             </a:r>
             <a:r>
-              <a:rPr lang="en-US" sz="1200" dirty="0" smtClean="0">
+              <a:rPr lang="en-US" sz="1200" dirty="0">
                 <a:solidFill>
                   <a:srgbClr val="1C1633"/>
                 </a:solidFill>
@@ -7649,10 +7990,69 @@
                 <a:ea typeface="맑은 고딕" pitchFamily="34" charset="-122"/>
                 <a:cs typeface="맑은 고딕" pitchFamily="34" charset="-120"/>
               </a:rPr>
+              <a:t>. MFA(</a:t>
+            </a:r>
+            <a:r>
+              <a:rPr lang="en-US" altLang="ko-KR" sz="1200" dirty="0"/>
+              <a:t>Multi-Factor Authentication)</a:t>
+            </a:r>
+            <a:r>
+              <a:rPr lang="en-US" sz="1200" dirty="0">
+                <a:solidFill>
+                  <a:srgbClr val="1C1633"/>
+                </a:solidFill>
+                <a:latin typeface="맑은 고딕" pitchFamily="34" charset="0"/>
+                <a:ea typeface="맑은 고딕" pitchFamily="34" charset="-122"/>
+                <a:cs typeface="맑은 고딕" pitchFamily="34" charset="-120"/>
+              </a:rPr>
+              <a:t> </a:t>
+            </a:r>
+            <a:r>
+              <a:rPr lang="ko-KR" altLang="en-US" sz="1200" dirty="0">
+                <a:solidFill>
+                  <a:srgbClr val="1C1633"/>
+                </a:solidFill>
+                <a:latin typeface="맑은 고딕" pitchFamily="34" charset="0"/>
+                <a:ea typeface="맑은 고딕" pitchFamily="34" charset="-122"/>
+                <a:cs typeface="맑은 고딕" pitchFamily="34" charset="-120"/>
+              </a:rPr>
+              <a:t>등록을 위해  휴대폰에 </a:t>
+            </a:r>
+            <a:r>
+              <a:rPr lang="en-US" altLang="ko-KR" sz="1200" dirty="0">
+                <a:solidFill>
+                  <a:srgbClr val="1C1633"/>
+                </a:solidFill>
+                <a:latin typeface="맑은 고딕" pitchFamily="34" charset="0"/>
+                <a:ea typeface="맑은 고딕" pitchFamily="34" charset="-122"/>
+                <a:cs typeface="맑은 고딕" pitchFamily="34" charset="-120"/>
+              </a:rPr>
+              <a:t>Google Authenticator </a:t>
+            </a:r>
+            <a:r>
+              <a:rPr lang="ko-KR" altLang="en-US" sz="1200" dirty="0">
+                <a:solidFill>
+                  <a:srgbClr val="1C1633"/>
+                </a:solidFill>
+                <a:latin typeface="맑은 고딕" pitchFamily="34" charset="0"/>
+                <a:ea typeface="맑은 고딕" pitchFamily="34" charset="-122"/>
+                <a:cs typeface="맑은 고딕" pitchFamily="34" charset="-120"/>
+              </a:rPr>
+              <a:t>앱을 설치합니다</a:t>
+            </a:r>
+            <a:r>
+              <a:rPr lang="en-US" altLang="ko-KR" sz="1200" dirty="0">
+                <a:solidFill>
+                  <a:srgbClr val="1C1633"/>
+                </a:solidFill>
+                <a:latin typeface="맑은 고딕" pitchFamily="34" charset="0"/>
+                <a:ea typeface="맑은 고딕" pitchFamily="34" charset="-122"/>
+                <a:cs typeface="맑은 고딕" pitchFamily="34" charset="-120"/>
+              </a:rPr>
               <a:t>. </a:t>
             </a:r>
             <a:r>
-              <a:rPr lang="en-US" sz="1200" dirty="0" smtClean="0">
+              <a:rPr lang="ko-KR" altLang="en-US" sz="1200" dirty="0" err="1">
                 <a:solidFill>
                   <a:srgbClr val="1C1633"/>
                 </a:solidFill>
@@ -7660,18 +8060,10 @@
                 <a:ea typeface="맑은 고딕" pitchFamily="34" charset="-122"/>
                 <a:cs typeface="맑은 고딕" pitchFamily="34" charset="-120"/>
               </a:rPr>
-              <a:t>MFA(</a:t>
-            </a:r>
-            <a:r>
-              <a:rPr lang="en-US" altLang="ko-KR" sz="1200" dirty="0"/>
-              <a:t>Multi-Factor </a:t>
-            </a:r>
-            <a:r>
-              <a:rPr lang="en-US" altLang="ko-KR" sz="1200" dirty="0" smtClean="0"/>
-              <a:t>Authentication)</a:t>
-            </a:r>
-            <a:r>
-              <a:rPr lang="en-US" sz="1200" dirty="0" smtClean="0">
+              <a:t>인증후</a:t>
+            </a:r>
+            <a:r>
+              <a:rPr lang="ko-KR" altLang="en-US" sz="1200" dirty="0">
                 <a:solidFill>
                   <a:srgbClr val="1C1633"/>
                 </a:solidFill>
@@ -7682,7 +8074,7 @@
               <a:t> </a:t>
             </a:r>
             <a:r>
-              <a:rPr lang="ko-KR" altLang="en-US" sz="1200" dirty="0" smtClean="0">
+              <a:rPr lang="en-US" altLang="ko-KR" sz="1200" dirty="0">
                 <a:solidFill>
                   <a:srgbClr val="1C1633"/>
                 </a:solidFill>
@@ -7690,10 +8082,10 @@
                 <a:ea typeface="맑은 고딕" pitchFamily="34" charset="-122"/>
                 <a:cs typeface="맑은 고딕" pitchFamily="34" charset="-120"/>
               </a:rPr>
-              <a:t>등록을 위해  휴대폰에 </a:t>
-            </a:r>
-            <a:r>
-              <a:rPr lang="en-US" altLang="ko-KR" sz="1200" dirty="0" smtClean="0">
+              <a:t>AWS Management Console</a:t>
+            </a:r>
+            <a:r>
+              <a:rPr lang="ko-KR" altLang="en-US" sz="1200" dirty="0">
                 <a:solidFill>
                   <a:srgbClr val="1C1633"/>
                 </a:solidFill>
@@ -7701,120 +8093,10 @@
                 <a:ea typeface="맑은 고딕" pitchFamily="34" charset="-122"/>
                 <a:cs typeface="맑은 고딕" pitchFamily="34" charset="-120"/>
               </a:rPr>
-              <a:t>Google </a:t>
+              <a:t>에 연결됩니다</a:t>
             </a:r>
             <a:r>
               <a:rPr lang="en-US" altLang="ko-KR" sz="1200" dirty="0">
-                <a:solidFill>
-                  <a:srgbClr val="1C1633"/>
-                </a:solidFill>
-                <a:latin typeface="맑은 고딕" pitchFamily="34" charset="0"/>
-                <a:ea typeface="맑은 고딕" pitchFamily="34" charset="-122"/>
-                <a:cs typeface="맑은 고딕" pitchFamily="34" charset="-120"/>
-              </a:rPr>
-              <a:t>A</a:t>
-            </a:r>
-            <a:r>
-              <a:rPr lang="en-US" altLang="ko-KR" sz="1200" dirty="0" smtClean="0">
-                <a:solidFill>
-                  <a:srgbClr val="1C1633"/>
-                </a:solidFill>
-                <a:latin typeface="맑은 고딕" pitchFamily="34" charset="0"/>
-                <a:ea typeface="맑은 고딕" pitchFamily="34" charset="-122"/>
-                <a:cs typeface="맑은 고딕" pitchFamily="34" charset="-120"/>
-              </a:rPr>
-              <a:t>uthenticator </a:t>
-            </a:r>
-            <a:r>
-              <a:rPr lang="ko-KR" altLang="en-US" sz="1200" dirty="0" smtClean="0">
-                <a:solidFill>
-                  <a:srgbClr val="1C1633"/>
-                </a:solidFill>
-                <a:latin typeface="맑은 고딕" pitchFamily="34" charset="0"/>
-                <a:ea typeface="맑은 고딕" pitchFamily="34" charset="-122"/>
-                <a:cs typeface="맑은 고딕" pitchFamily="34" charset="-120"/>
-              </a:rPr>
-              <a:t>앱을 설치합니다</a:t>
-            </a:r>
-            <a:r>
-              <a:rPr lang="en-US" altLang="ko-KR" sz="1200" dirty="0" smtClean="0">
-                <a:solidFill>
-                  <a:srgbClr val="1C1633"/>
-                </a:solidFill>
-                <a:latin typeface="맑은 고딕" pitchFamily="34" charset="0"/>
-                <a:ea typeface="맑은 고딕" pitchFamily="34" charset="-122"/>
-                <a:cs typeface="맑은 고딕" pitchFamily="34" charset="-120"/>
-              </a:rPr>
-              <a:t>. </a:t>
-            </a:r>
-            <a:r>
-              <a:rPr lang="ko-KR" altLang="en-US" sz="1200" dirty="0" err="1" smtClean="0">
-                <a:solidFill>
-                  <a:srgbClr val="1C1633"/>
-                </a:solidFill>
-                <a:latin typeface="맑은 고딕" pitchFamily="34" charset="0"/>
-                <a:ea typeface="맑은 고딕" pitchFamily="34" charset="-122"/>
-                <a:cs typeface="맑은 고딕" pitchFamily="34" charset="-120"/>
-              </a:rPr>
-              <a:t>인증후</a:t>
-            </a:r>
-            <a:r>
-              <a:rPr lang="ko-KR" altLang="en-US" sz="1200" dirty="0" smtClean="0">
-                <a:solidFill>
-                  <a:srgbClr val="1C1633"/>
-                </a:solidFill>
-                <a:latin typeface="맑은 고딕" pitchFamily="34" charset="0"/>
-                <a:ea typeface="맑은 고딕" pitchFamily="34" charset="-122"/>
-                <a:cs typeface="맑은 고딕" pitchFamily="34" charset="-120"/>
-              </a:rPr>
-              <a:t> </a:t>
-            </a:r>
-            <a:r>
-              <a:rPr lang="en-US" altLang="ko-KR" sz="1200" dirty="0" smtClean="0">
-                <a:solidFill>
-                  <a:srgbClr val="1C1633"/>
-                </a:solidFill>
-                <a:latin typeface="맑은 고딕" pitchFamily="34" charset="0"/>
-                <a:ea typeface="맑은 고딕" pitchFamily="34" charset="-122"/>
-                <a:cs typeface="맑은 고딕" pitchFamily="34" charset="-120"/>
-              </a:rPr>
-              <a:t>AWS Management </a:t>
-            </a:r>
-            <a:r>
-              <a:rPr lang="en-US" altLang="ko-KR" sz="1200" dirty="0">
-                <a:solidFill>
-                  <a:srgbClr val="1C1633"/>
-                </a:solidFill>
-                <a:latin typeface="맑은 고딕" pitchFamily="34" charset="0"/>
-                <a:ea typeface="맑은 고딕" pitchFamily="34" charset="-122"/>
-                <a:cs typeface="맑은 고딕" pitchFamily="34" charset="-120"/>
-              </a:rPr>
-              <a:t>C</a:t>
-            </a:r>
-            <a:r>
-              <a:rPr lang="en-US" altLang="ko-KR" sz="1200" dirty="0" smtClean="0">
-                <a:solidFill>
-                  <a:srgbClr val="1C1633"/>
-                </a:solidFill>
-                <a:latin typeface="맑은 고딕" pitchFamily="34" charset="0"/>
-                <a:ea typeface="맑은 고딕" pitchFamily="34" charset="-122"/>
-                <a:cs typeface="맑은 고딕" pitchFamily="34" charset="-120"/>
-              </a:rPr>
-              <a:t>onsole</a:t>
-            </a:r>
-            <a:r>
-              <a:rPr lang="ko-KR" altLang="en-US" sz="1200" dirty="0" smtClean="0">
-                <a:solidFill>
-                  <a:srgbClr val="1C1633"/>
-                </a:solidFill>
-                <a:latin typeface="맑은 고딕" pitchFamily="34" charset="0"/>
-                <a:ea typeface="맑은 고딕" pitchFamily="34" charset="-122"/>
-                <a:cs typeface="맑은 고딕" pitchFamily="34" charset="-120"/>
-              </a:rPr>
-              <a:t>에 연결됩니다</a:t>
-            </a:r>
-            <a:r>
-              <a:rPr lang="en-US" altLang="ko-KR" sz="1200" dirty="0" smtClean="0">
                 <a:solidFill>
                   <a:srgbClr val="1C1633"/>
                 </a:solidFill>
@@ -7854,6 +8136,13 @@
             <a:prstDash val="solid"/>
           </a:ln>
         </p:spPr>
+        <p:txBody>
+          <a:bodyPr/>
+          <a:lstStyle/>
+          <a:p>
+            <a:endParaRPr lang="ko-KR" altLang="en-US"/>
+          </a:p>
+        </p:txBody>
       </p:sp>
       <p:sp>
         <p:nvSpPr>
@@ -7874,6 +8163,13 @@
           </a:solidFill>
           <a:ln/>
         </p:spPr>
+        <p:txBody>
+          <a:bodyPr/>
+          <a:lstStyle/>
+          <a:p>
+            <a:endParaRPr lang="ko-KR" altLang="en-US"/>
+          </a:p>
+        </p:txBody>
       </p:sp>
       <p:sp>
         <p:nvSpPr>
@@ -7894,6 +8190,13 @@
           </a:solidFill>
           <a:ln/>
         </p:spPr>
+        <p:txBody>
+          <a:bodyPr/>
+          <a:lstStyle/>
+          <a:p>
+            <a:endParaRPr lang="ko-KR" altLang="en-US"/>
+          </a:p>
+        </p:txBody>
       </p:sp>
       <p:sp>
         <p:nvSpPr>
@@ -7914,6 +8217,13 @@
           </a:solidFill>
           <a:ln/>
         </p:spPr>
+        <p:txBody>
+          <a:bodyPr/>
+          <a:lstStyle/>
+          <a:p>
+            <a:endParaRPr lang="ko-KR" altLang="en-US"/>
+          </a:p>
+        </p:txBody>
       </p:sp>
       <p:sp>
         <p:nvSpPr>
@@ -7941,6 +8251,13 @@
             <a:prstDash val="solid"/>
           </a:ln>
         </p:spPr>
+        <p:txBody>
+          <a:bodyPr/>
+          <a:lstStyle/>
+          <a:p>
+            <a:endParaRPr lang="ko-KR" altLang="en-US"/>
+          </a:p>
+        </p:txBody>
       </p:sp>
       <p:sp>
         <p:nvSpPr>
@@ -7961,6 +8278,13 @@
           </a:solidFill>
           <a:ln/>
         </p:spPr>
+        <p:txBody>
+          <a:bodyPr/>
+          <a:lstStyle/>
+          <a:p>
+            <a:endParaRPr lang="ko-KR" altLang="en-US"/>
+          </a:p>
+        </p:txBody>
       </p:sp>
       <p:sp>
         <p:nvSpPr>
@@ -7981,6 +8305,13 @@
           </a:solidFill>
           <a:ln/>
         </p:spPr>
+        <p:txBody>
+          <a:bodyPr/>
+          <a:lstStyle/>
+          <a:p>
+            <a:endParaRPr lang="ko-KR" altLang="en-US"/>
+          </a:p>
+        </p:txBody>
       </p:sp>
       <p:sp>
         <p:nvSpPr>
@@ -8001,6 +8332,13 @@
           </a:solidFill>
           <a:ln/>
         </p:spPr>
+        <p:txBody>
+          <a:bodyPr/>
+          <a:lstStyle/>
+          <a:p>
+            <a:endParaRPr lang="ko-KR" altLang="en-US"/>
+          </a:p>
+        </p:txBody>
       </p:sp>
       <p:sp>
         <p:nvSpPr>
@@ -8066,7 +8404,7 @@
               <a:buNone/>
             </a:pPr>
             <a:r>
-              <a:rPr lang="en-US" sz="900" dirty="0" smtClean="0">
+              <a:rPr lang="en-US" sz="900" dirty="0">
                 <a:solidFill>
                   <a:srgbClr val="6E6690"/>
                 </a:solidFill>
@@ -8206,6 +8544,13 @@
           </a:solidFill>
           <a:ln/>
         </p:spPr>
+        <p:txBody>
+          <a:bodyPr/>
+          <a:lstStyle/>
+          <a:p>
+            <a:endParaRPr lang="ko-KR" altLang="en-US"/>
+          </a:p>
+        </p:txBody>
       </p:sp>
       <p:sp>
         <p:nvSpPr>
@@ -8271,7 +8616,7 @@
               <a:buNone/>
             </a:pPr>
             <a:r>
-              <a:rPr lang="en-US" sz="2700" b="1" dirty="0" smtClean="0">
+              <a:rPr lang="en-US" sz="2700" b="1" dirty="0">
                 <a:solidFill>
                   <a:srgbClr val="1C1633"/>
                 </a:solidFill>
@@ -8279,18 +8624,7 @@
                 <a:ea typeface="맑은 고딕" pitchFamily="34" charset="-122"/>
                 <a:cs typeface="맑은 고딕" pitchFamily="34" charset="-120"/>
               </a:rPr>
-              <a:t>Free </a:t>
-            </a:r>
-            <a:r>
-              <a:rPr lang="en-US" sz="2700" b="1" dirty="0">
-                <a:solidFill>
-                  <a:srgbClr val="1C1633"/>
-                </a:solidFill>
-                <a:latin typeface="맑은 고딕" pitchFamily="34" charset="0"/>
-                <a:ea typeface="맑은 고딕" pitchFamily="34" charset="-122"/>
-                <a:cs typeface="맑은 고딕" pitchFamily="34" charset="-120"/>
-              </a:rPr>
-              <a:t>Plan / Paid Plan 구조</a:t>
+              <a:t>Free Plan / Paid Plan 구조</a:t>
             </a:r>
             <a:endParaRPr lang="en-US" sz="2700" dirty="0"/>
           </a:p>
@@ -8317,6 +8651,13 @@
           </a:solidFill>
           <a:ln/>
         </p:spPr>
+        <p:txBody>
+          <a:bodyPr/>
+          <a:lstStyle/>
+          <a:p>
+            <a:endParaRPr lang="ko-KR" altLang="en-US"/>
+          </a:p>
+        </p:txBody>
       </p:sp>
       <p:sp>
         <p:nvSpPr>
@@ -8474,10 +8815,10 @@
                 <a:ea typeface="맑은 고딕" pitchFamily="34" charset="-122"/>
                 <a:cs typeface="맑은 고딕" pitchFamily="34" charset="-120"/>
               </a:rPr>
-              <a:t>•  </a:t>
-            </a:r>
-            <a:r>
-              <a:rPr lang="en-US" sz="1080" dirty="0" smtClean="0">
+              <a:t>•  EC2 </a:t>
+            </a:r>
+            <a:r>
+              <a:rPr lang="ko-KR" altLang="en-US" sz="1080" dirty="0">
                 <a:solidFill>
                   <a:srgbClr val="1C1633"/>
                 </a:solidFill>
@@ -8485,10 +8826,10 @@
                 <a:ea typeface="맑은 고딕" pitchFamily="34" charset="-122"/>
                 <a:cs typeface="맑은 고딕" pitchFamily="34" charset="-120"/>
               </a:rPr>
-              <a:t>EC2 </a:t>
-            </a:r>
-            <a:r>
-              <a:rPr lang="ko-KR" altLang="en-US" sz="1080" dirty="0" smtClean="0">
+              <a:t>인스턴스 실행</a:t>
+            </a:r>
+            <a:r>
+              <a:rPr lang="en-US" sz="1080" dirty="0">
                 <a:solidFill>
                   <a:srgbClr val="1C1633"/>
                 </a:solidFill>
@@ -8496,10 +8837,10 @@
                 <a:ea typeface="맑은 고딕" pitchFamily="34" charset="-122"/>
                 <a:cs typeface="맑은 고딕" pitchFamily="34" charset="-120"/>
               </a:rPr>
-              <a:t>인스턴스 실행</a:t>
-            </a:r>
-            <a:r>
-              <a:rPr lang="en-US" sz="1080" dirty="0" smtClean="0">
+              <a:t>, RDS DB</a:t>
+            </a:r>
+            <a:r>
+              <a:rPr lang="ko-KR" altLang="en-US" sz="1080" dirty="0">
                 <a:solidFill>
                   <a:srgbClr val="1C1633"/>
                 </a:solidFill>
@@ -8507,10 +8848,10 @@
                 <a:ea typeface="맑은 고딕" pitchFamily="34" charset="-122"/>
                 <a:cs typeface="맑은 고딕" pitchFamily="34" charset="-120"/>
               </a:rPr>
-              <a:t>, RDS DB</a:t>
-            </a:r>
-            <a:r>
-              <a:rPr lang="ko-KR" altLang="en-US" sz="1080" dirty="0" smtClean="0">
+              <a:t>생성</a:t>
+            </a:r>
+            <a:r>
+              <a:rPr lang="en-US" sz="1080" dirty="0">
                 <a:solidFill>
                   <a:srgbClr val="1C1633"/>
                 </a:solidFill>
@@ -8518,10 +8859,10 @@
                 <a:ea typeface="맑은 고딕" pitchFamily="34" charset="-122"/>
                 <a:cs typeface="맑은 고딕" pitchFamily="34" charset="-120"/>
               </a:rPr>
-              <a:t>생성</a:t>
-            </a:r>
-            <a:r>
-              <a:rPr lang="en-US" sz="1080" dirty="0" smtClean="0">
+              <a:t>, Lambda</a:t>
+            </a:r>
+            <a:r>
+              <a:rPr lang="ko-KR" altLang="en-US" sz="1080" dirty="0">
                 <a:solidFill>
                   <a:srgbClr val="1C1633"/>
                 </a:solidFill>
@@ -8529,10 +8870,10 @@
                 <a:ea typeface="맑은 고딕" pitchFamily="34" charset="-122"/>
                 <a:cs typeface="맑은 고딕" pitchFamily="34" charset="-120"/>
               </a:rPr>
-              <a:t>, Lambda</a:t>
-            </a:r>
-            <a:r>
-              <a:rPr lang="ko-KR" altLang="en-US" sz="1080" dirty="0" smtClean="0">
+              <a:t>로 </a:t>
+            </a:r>
+            <a:r>
+              <a:rPr lang="ko-KR" altLang="en-US" sz="1080" dirty="0" err="1">
                 <a:solidFill>
                   <a:srgbClr val="1C1633"/>
                 </a:solidFill>
@@ -8540,10 +8881,65 @@
                 <a:ea typeface="맑은 고딕" pitchFamily="34" charset="-122"/>
                 <a:cs typeface="맑은 고딕" pitchFamily="34" charset="-120"/>
               </a:rPr>
+              <a:t>웹앱</a:t>
+            </a:r>
+            <a:r>
+              <a:rPr lang="ko-KR" altLang="en-US" sz="1080" dirty="0">
+                <a:solidFill>
+                  <a:srgbClr val="1C1633"/>
+                </a:solidFill>
+                <a:latin typeface="맑은 고딕" pitchFamily="34" charset="0"/>
+                <a:ea typeface="맑은 고딕" pitchFamily="34" charset="-122"/>
+                <a:cs typeface="맑은 고딕" pitchFamily="34" charset="-120"/>
+              </a:rPr>
+              <a:t> 만들기</a:t>
+            </a:r>
+            <a:r>
+              <a:rPr lang="en-US" sz="1080" dirty="0">
+                <a:solidFill>
+                  <a:srgbClr val="1C1633"/>
+                </a:solidFill>
+                <a:latin typeface="맑은 고딕" pitchFamily="34" charset="0"/>
+                <a:ea typeface="맑은 고딕" pitchFamily="34" charset="-122"/>
+                <a:cs typeface="맑은 고딕" pitchFamily="34" charset="-120"/>
+              </a:rPr>
+              <a:t>, Bedrock </a:t>
+            </a:r>
+            <a:r>
+              <a:rPr lang="ko-KR" altLang="en-US" sz="1080" dirty="0">
+                <a:solidFill>
+                  <a:srgbClr val="1C1633"/>
+                </a:solidFill>
+                <a:latin typeface="맑은 고딕" pitchFamily="34" charset="0"/>
+                <a:ea typeface="맑은 고딕" pitchFamily="34" charset="-122"/>
+                <a:cs typeface="맑은 고딕" pitchFamily="34" charset="-120"/>
+              </a:rPr>
+              <a:t>플레이그라운드 사용</a:t>
+            </a:r>
+            <a:r>
+              <a:rPr lang="en-US" sz="1080" dirty="0">
+                <a:solidFill>
+                  <a:srgbClr val="1C1633"/>
+                </a:solidFill>
+                <a:latin typeface="맑은 고딕" pitchFamily="34" charset="0"/>
+                <a:ea typeface="맑은 고딕" pitchFamily="34" charset="-122"/>
+                <a:cs typeface="맑은 고딕" pitchFamily="34" charset="-120"/>
+              </a:rPr>
+              <a:t>, Budgets</a:t>
+            </a:r>
+            <a:r>
+              <a:rPr lang="ko-KR" altLang="en-US" sz="1080" dirty="0">
+                <a:solidFill>
+                  <a:srgbClr val="1C1633"/>
+                </a:solidFill>
+                <a:latin typeface="맑은 고딕" pitchFamily="34" charset="0"/>
+                <a:ea typeface="맑은 고딕" pitchFamily="34" charset="-122"/>
+                <a:cs typeface="맑은 고딕" pitchFamily="34" charset="-120"/>
+              </a:rPr>
               <a:t>로 </a:t>
             </a:r>
             <a:r>
-              <a:rPr lang="ko-KR" altLang="en-US" sz="1080" dirty="0" err="1" smtClean="0">
+              <a:rPr lang="ko-KR" altLang="en-US" sz="1080" dirty="0" err="1">
                 <a:solidFill>
                   <a:srgbClr val="1C1633"/>
                 </a:solidFill>
@@ -8551,10 +8947,10 @@
                 <a:ea typeface="맑은 고딕" pitchFamily="34" charset="-122"/>
                 <a:cs typeface="맑은 고딕" pitchFamily="34" charset="-120"/>
               </a:rPr>
-              <a:t>웹앱</a:t>
-            </a:r>
-            <a:r>
-              <a:rPr lang="ko-KR" altLang="en-US" sz="1080" dirty="0" smtClean="0">
+              <a:t>비용예산</a:t>
+            </a:r>
+            <a:r>
+              <a:rPr lang="ko-KR" altLang="en-US" sz="1080" dirty="0">
                 <a:solidFill>
                   <a:srgbClr val="1C1633"/>
                 </a:solidFill>
@@ -8562,10 +8958,10 @@
                 <a:ea typeface="맑은 고딕" pitchFamily="34" charset="-122"/>
                 <a:cs typeface="맑은 고딕" pitchFamily="34" charset="-120"/>
               </a:rPr>
-              <a:t> 만들기</a:t>
-            </a:r>
-            <a:r>
-              <a:rPr lang="en-US" sz="1080" dirty="0" smtClean="0">
+              <a:t> 설정</a:t>
+            </a:r>
+            <a:r>
+              <a:rPr lang="en-US" altLang="ko-KR" sz="1080" dirty="0">
                 <a:solidFill>
                   <a:srgbClr val="1C1633"/>
                 </a:solidFill>
@@ -8573,10 +8969,10 @@
                 <a:ea typeface="맑은 고딕" pitchFamily="34" charset="-122"/>
                 <a:cs typeface="맑은 고딕" pitchFamily="34" charset="-120"/>
               </a:rPr>
-              <a:t>, Bedrock </a:t>
-            </a:r>
-            <a:r>
-              <a:rPr lang="ko-KR" altLang="en-US" sz="1080" dirty="0" smtClean="0">
+              <a:t>.</a:t>
+            </a:r>
+            <a:r>
+              <a:rPr lang="en-US" sz="1080" dirty="0">
                 <a:solidFill>
                   <a:srgbClr val="1C1633"/>
                 </a:solidFill>
@@ -8584,95 +8980,7 @@
                 <a:ea typeface="맑은 고딕" pitchFamily="34" charset="-122"/>
                 <a:cs typeface="맑은 고딕" pitchFamily="34" charset="-120"/>
               </a:rPr>
-              <a:t>플레이그라운드 사용</a:t>
-            </a:r>
-            <a:r>
-              <a:rPr lang="en-US" sz="1080" dirty="0" smtClean="0">
-                <a:solidFill>
-                  <a:srgbClr val="1C1633"/>
-                </a:solidFill>
-                <a:latin typeface="맑은 고딕" pitchFamily="34" charset="0"/>
-                <a:ea typeface="맑은 고딕" pitchFamily="34" charset="-122"/>
-                <a:cs typeface="맑은 고딕" pitchFamily="34" charset="-120"/>
-              </a:rPr>
-              <a:t>, Budgets</a:t>
-            </a:r>
-            <a:r>
-              <a:rPr lang="ko-KR" altLang="en-US" sz="1080" dirty="0" smtClean="0">
-                <a:solidFill>
-                  <a:srgbClr val="1C1633"/>
-                </a:solidFill>
-                <a:latin typeface="맑은 고딕" pitchFamily="34" charset="0"/>
-                <a:ea typeface="맑은 고딕" pitchFamily="34" charset="-122"/>
-                <a:cs typeface="맑은 고딕" pitchFamily="34" charset="-120"/>
-              </a:rPr>
-              <a:t>로 </a:t>
-            </a:r>
-            <a:r>
-              <a:rPr lang="ko-KR" altLang="en-US" sz="1080" dirty="0" err="1" smtClean="0">
-                <a:solidFill>
-                  <a:srgbClr val="1C1633"/>
-                </a:solidFill>
-                <a:latin typeface="맑은 고딕" pitchFamily="34" charset="0"/>
-                <a:ea typeface="맑은 고딕" pitchFamily="34" charset="-122"/>
-                <a:cs typeface="맑은 고딕" pitchFamily="34" charset="-120"/>
-              </a:rPr>
-              <a:t>비용예산</a:t>
-            </a:r>
-            <a:r>
-              <a:rPr lang="ko-KR" altLang="en-US" sz="1080" dirty="0" smtClean="0">
-                <a:solidFill>
-                  <a:srgbClr val="1C1633"/>
-                </a:solidFill>
-                <a:latin typeface="맑은 고딕" pitchFamily="34" charset="0"/>
-                <a:ea typeface="맑은 고딕" pitchFamily="34" charset="-122"/>
-                <a:cs typeface="맑은 고딕" pitchFamily="34" charset="-120"/>
-              </a:rPr>
-              <a:t> </a:t>
-            </a:r>
-            <a:r>
-              <a:rPr lang="ko-KR" altLang="en-US" sz="1080" dirty="0" smtClean="0">
-                <a:solidFill>
-                  <a:srgbClr val="1C1633"/>
-                </a:solidFill>
-                <a:latin typeface="맑은 고딕" pitchFamily="34" charset="0"/>
-                <a:ea typeface="맑은 고딕" pitchFamily="34" charset="-122"/>
-                <a:cs typeface="맑은 고딕" pitchFamily="34" charset="-120"/>
-              </a:rPr>
-              <a:t>설정</a:t>
-            </a:r>
-            <a:r>
-              <a:rPr lang="en-US" altLang="ko-KR" sz="1080" dirty="0" smtClean="0">
-                <a:solidFill>
-                  <a:srgbClr val="1C1633"/>
-                </a:solidFill>
-                <a:latin typeface="맑은 고딕" pitchFamily="34" charset="0"/>
-                <a:ea typeface="맑은 고딕" pitchFamily="34" charset="-122"/>
-                <a:cs typeface="맑은 고딕" pitchFamily="34" charset="-120"/>
-              </a:rPr>
-              <a:t>.</a:t>
-            </a:r>
-            <a:r>
-              <a:rPr lang="en-US" sz="1080" dirty="0" smtClean="0">
-                <a:solidFill>
-                  <a:srgbClr val="1C1633"/>
-                </a:solidFill>
-                <a:latin typeface="맑은 고딕" pitchFamily="34" charset="0"/>
-                <a:ea typeface="맑은 고딕" pitchFamily="34" charset="-122"/>
-                <a:cs typeface="맑은 고딕" pitchFamily="34" charset="-120"/>
-              </a:rPr>
-              <a:t> </a:t>
-            </a:r>
-            <a:r>
-              <a:rPr lang="en-US" sz="1080" dirty="0">
-                <a:solidFill>
-                  <a:srgbClr val="1C1633"/>
-                </a:solidFill>
-                <a:latin typeface="맑은 고딕" pitchFamily="34" charset="0"/>
-                <a:ea typeface="맑은 고딕" pitchFamily="34" charset="-122"/>
-                <a:cs typeface="맑은 고딕" pitchFamily="34" charset="-120"/>
-              </a:rPr>
-              <a:t>최대 $100 추가 크레딧</a:t>
+              <a:t> 최대 $100 추가 크레딧</a:t>
             </a:r>
             <a:endParaRPr lang="en-US" sz="1080" dirty="0"/>
           </a:p>
@@ -8741,6 +9049,13 @@
           </a:solidFill>
           <a:ln/>
         </p:spPr>
+        <p:txBody>
+          <a:bodyPr/>
+          <a:lstStyle/>
+          <a:p>
+            <a:endParaRPr lang="ko-KR" altLang="en-US"/>
+          </a:p>
+        </p:txBody>
       </p:sp>
       <p:sp>
         <p:nvSpPr>
@@ -8925,6 +9240,13 @@
           </a:solidFill>
           <a:ln/>
         </p:spPr>
+        <p:txBody>
+          <a:bodyPr/>
+          <a:lstStyle/>
+          <a:p>
+            <a:endParaRPr lang="ko-KR" altLang="en-US"/>
+          </a:p>
+        </p:txBody>
       </p:sp>
       <p:sp>
         <p:nvSpPr>
@@ -9065,7 +9387,7 @@
               <a:buNone/>
             </a:pPr>
             <a:r>
-              <a:rPr lang="en-US" sz="900" dirty="0" smtClean="0">
+              <a:rPr lang="en-US" sz="900" dirty="0">
                 <a:solidFill>
                   <a:srgbClr val="6E6690"/>
                 </a:solidFill>
@@ -9125,6 +9447,13 @@
           </a:solidFill>
           <a:ln/>
         </p:spPr>
+        <p:txBody>
+          <a:bodyPr/>
+          <a:lstStyle/>
+          <a:p>
+            <a:endParaRPr lang="ko-KR" altLang="en-US"/>
+          </a:p>
+        </p:txBody>
       </p:sp>
       <p:sp>
         <p:nvSpPr>
@@ -9286,6 +9615,13 @@
           </a:solidFill>
           <a:ln/>
         </p:spPr>
+        <p:txBody>
+          <a:bodyPr/>
+          <a:lstStyle/>
+          <a:p>
+            <a:endParaRPr lang="ko-KR" altLang="en-US"/>
+          </a:p>
+        </p:txBody>
       </p:sp>
       <p:sp>
         <p:nvSpPr>
@@ -9306,6 +9642,13 @@
           </a:solidFill>
           <a:ln/>
         </p:spPr>
+        <p:txBody>
+          <a:bodyPr/>
+          <a:lstStyle/>
+          <a:p>
+            <a:endParaRPr lang="ko-KR" altLang="en-US"/>
+          </a:p>
+        </p:txBody>
       </p:sp>
       <p:sp>
         <p:nvSpPr>
@@ -9451,6 +9794,13 @@
           </a:solidFill>
           <a:ln/>
         </p:spPr>
+        <p:txBody>
+          <a:bodyPr/>
+          <a:lstStyle/>
+          <a:p>
+            <a:endParaRPr lang="ko-KR" altLang="en-US"/>
+          </a:p>
+        </p:txBody>
       </p:sp>
       <p:sp>
         <p:nvSpPr>
@@ -9471,6 +9821,13 @@
           </a:solidFill>
           <a:ln/>
         </p:spPr>
+        <p:txBody>
+          <a:bodyPr/>
+          <a:lstStyle/>
+          <a:p>
+            <a:endParaRPr lang="ko-KR" altLang="en-US"/>
+          </a:p>
+        </p:txBody>
       </p:sp>
       <p:sp>
         <p:nvSpPr>
@@ -9616,6 +9973,13 @@
           </a:solidFill>
           <a:ln/>
         </p:spPr>
+        <p:txBody>
+          <a:bodyPr/>
+          <a:lstStyle/>
+          <a:p>
+            <a:endParaRPr lang="ko-KR" altLang="en-US"/>
+          </a:p>
+        </p:txBody>
       </p:sp>
       <p:sp>
         <p:nvSpPr>
@@ -9636,6 +10000,13 @@
           </a:solidFill>
           <a:ln/>
         </p:spPr>
+        <p:txBody>
+          <a:bodyPr/>
+          <a:lstStyle/>
+          <a:p>
+            <a:endParaRPr lang="ko-KR" altLang="en-US"/>
+          </a:p>
+        </p:txBody>
       </p:sp>
       <p:sp>
         <p:nvSpPr>
@@ -9781,6 +10152,13 @@
           </a:solidFill>
           <a:ln/>
         </p:spPr>
+        <p:txBody>
+          <a:bodyPr/>
+          <a:lstStyle/>
+          <a:p>
+            <a:endParaRPr lang="ko-KR" altLang="en-US"/>
+          </a:p>
+        </p:txBody>
       </p:sp>
       <p:sp>
         <p:nvSpPr>
@@ -9801,6 +10179,13 @@
           </a:solidFill>
           <a:ln/>
         </p:spPr>
+        <p:txBody>
+          <a:bodyPr/>
+          <a:lstStyle/>
+          <a:p>
+            <a:endParaRPr lang="ko-KR" altLang="en-US"/>
+          </a:p>
+        </p:txBody>
       </p:sp>
       <p:sp>
         <p:nvSpPr>
@@ -10102,6 +10487,13 @@
           </a:solidFill>
           <a:ln/>
         </p:spPr>
+        <p:txBody>
+          <a:bodyPr/>
+          <a:lstStyle/>
+          <a:p>
+            <a:endParaRPr lang="ko-KR" altLang="en-US"/>
+          </a:p>
+        </p:txBody>
       </p:sp>
       <p:sp>
         <p:nvSpPr>
@@ -10242,10 +10634,9 @@
               <a:buNone/>
             </a:pPr>
             <a:r>
-              <a:rPr lang="en-US" sz="900" dirty="0" smtClean="0"/>
+              <a:rPr lang="en-US" sz="900" dirty="0"/>
               <a:t>20</a:t>
             </a:r>
-            <a:endParaRPr lang="en-US" sz="900" dirty="0"/>
           </a:p>
         </p:txBody>
       </p:sp>
@@ -10345,6 +10736,13 @@
           </a:solidFill>
           <a:ln/>
         </p:spPr>
+        <p:txBody>
+          <a:bodyPr/>
+          <a:lstStyle/>
+          <a:p>
+            <a:endParaRPr lang="ko-KR" altLang="en-US"/>
+          </a:p>
+        </p:txBody>
       </p:sp>
       <p:sp>
         <p:nvSpPr>
@@ -10485,6 +10883,13 @@
             <a:prstDash val="solid"/>
           </a:ln>
         </p:spPr>
+        <p:txBody>
+          <a:bodyPr/>
+          <a:lstStyle/>
+          <a:p>
+            <a:endParaRPr lang="ko-KR" altLang="en-US"/>
+          </a:p>
+        </p:txBody>
       </p:sp>
       <p:sp>
         <p:nvSpPr>
@@ -10505,6 +10910,13 @@
           </a:solidFill>
           <a:ln/>
         </p:spPr>
+        <p:txBody>
+          <a:bodyPr/>
+          <a:lstStyle/>
+          <a:p>
+            <a:endParaRPr lang="ko-KR" altLang="en-US"/>
+          </a:p>
+        </p:txBody>
       </p:sp>
       <p:sp>
         <p:nvSpPr>
@@ -10570,7 +10982,7 @@
               <a:buNone/>
             </a:pPr>
             <a:r>
-              <a:rPr lang="en-US" sz="1700" b="1" dirty="0" smtClean="0">
+              <a:rPr lang="en-US" sz="1700" b="1" dirty="0">
                 <a:solidFill>
                   <a:srgbClr val="1C1633"/>
                 </a:solidFill>
@@ -10578,18 +10990,7 @@
                 <a:ea typeface="맑은 고딕" pitchFamily="34" charset="-122"/>
                 <a:cs typeface="맑은 고딕" pitchFamily="34" charset="-120"/>
               </a:rPr>
-              <a:t>AWS </a:t>
-            </a:r>
-            <a:r>
-              <a:rPr lang="en-US" sz="1700" b="1" dirty="0">
-                <a:solidFill>
-                  <a:srgbClr val="1C1633"/>
-                </a:solidFill>
-                <a:latin typeface="맑은 고딕" pitchFamily="34" charset="0"/>
-                <a:ea typeface="맑은 고딕" pitchFamily="34" charset="-122"/>
-                <a:cs typeface="맑은 고딕" pitchFamily="34" charset="-120"/>
-              </a:rPr>
-              <a:t>계정 만들기</a:t>
+              <a:t>AWS 계정 만들기</a:t>
             </a:r>
             <a:endParaRPr lang="en-US" sz="1700" dirty="0"/>
           </a:p>
@@ -10656,6 +11057,13 @@
             <a:prstDash val="solid"/>
           </a:ln>
         </p:spPr>
+        <p:txBody>
+          <a:bodyPr/>
+          <a:lstStyle/>
+          <a:p>
+            <a:endParaRPr lang="ko-KR" altLang="en-US"/>
+          </a:p>
+        </p:txBody>
       </p:sp>
       <p:sp>
         <p:nvSpPr>
@@ -10676,6 +11084,13 @@
           </a:solidFill>
           <a:ln/>
         </p:spPr>
+        <p:txBody>
+          <a:bodyPr/>
+          <a:lstStyle/>
+          <a:p>
+            <a:endParaRPr lang="ko-KR" altLang="en-US"/>
+          </a:p>
+        </p:txBody>
       </p:sp>
       <p:sp>
         <p:nvSpPr>
@@ -10741,7 +11156,7 @@
               <a:buNone/>
             </a:pPr>
             <a:r>
-              <a:rPr lang="en-US" sz="1700" b="1" dirty="0" err="1" smtClean="0">
+              <a:rPr lang="en-US" sz="1700" b="1" dirty="0" err="1">
                 <a:solidFill>
                   <a:srgbClr val="1C1633"/>
                 </a:solidFill>
@@ -10752,7 +11167,7 @@
               <a:t>계정</a:t>
             </a:r>
             <a:r>
-              <a:rPr lang="en-US" sz="1700" b="1" dirty="0" smtClean="0">
+              <a:rPr lang="en-US" sz="1700" b="1" dirty="0">
                 <a:solidFill>
                   <a:srgbClr val="1C1633"/>
                 </a:solidFill>
@@ -10760,18 +11175,7 @@
                 <a:ea typeface="맑은 고딕" pitchFamily="34" charset="-122"/>
                 <a:cs typeface="맑은 고딕" pitchFamily="34" charset="-120"/>
               </a:rPr>
-              <a:t> </a:t>
-            </a:r>
-            <a:r>
-              <a:rPr lang="en-US" sz="1700" b="1" dirty="0">
-                <a:solidFill>
-                  <a:srgbClr val="1C1633"/>
-                </a:solidFill>
-                <a:latin typeface="맑은 고딕" pitchFamily="34" charset="0"/>
-                <a:ea typeface="맑은 고딕" pitchFamily="34" charset="-122"/>
-                <a:cs typeface="맑은 고딕" pitchFamily="34" charset="-120"/>
-              </a:rPr>
-              <a:t>보안의 첫걸음</a:t>
+              <a:t> 보안의 첫걸음</a:t>
             </a:r>
             <a:endParaRPr lang="en-US" sz="1700" dirty="0"/>
           </a:p>
@@ -10838,6 +11242,13 @@
             <a:prstDash val="solid"/>
           </a:ln>
         </p:spPr>
+        <p:txBody>
+          <a:bodyPr/>
+          <a:lstStyle/>
+          <a:p>
+            <a:endParaRPr lang="ko-KR" altLang="en-US"/>
+          </a:p>
+        </p:txBody>
       </p:sp>
       <p:sp>
         <p:nvSpPr>
@@ -10963,6 +11374,13 @@
           </a:solidFill>
           <a:ln/>
         </p:spPr>
+        <p:txBody>
+          <a:bodyPr/>
+          <a:lstStyle/>
+          <a:p>
+            <a:endParaRPr lang="ko-KR" altLang="en-US"/>
+          </a:p>
+        </p:txBody>
       </p:sp>
       <p:sp>
         <p:nvSpPr>
@@ -11022,6 +11440,13 @@
           </a:solidFill>
           <a:ln/>
         </p:spPr>
+        <p:txBody>
+          <a:bodyPr/>
+          <a:lstStyle/>
+          <a:p>
+            <a:endParaRPr lang="ko-KR" altLang="en-US"/>
+          </a:p>
+        </p:txBody>
       </p:sp>
       <p:sp>
         <p:nvSpPr>
@@ -11048,7 +11473,7 @@
               <a:buNone/>
             </a:pPr>
             <a:r>
-              <a:rPr lang="en-US" sz="1200" b="1" dirty="0" smtClean="0">
+              <a:rPr lang="en-US" sz="1200" b="1" dirty="0">
                 <a:solidFill>
                   <a:srgbClr val="FFFFFF"/>
                 </a:solidFill>
@@ -11183,6 +11608,13 @@
             <a:prstDash val="solid"/>
           </a:ln>
         </p:spPr>
+        <p:txBody>
+          <a:bodyPr/>
+          <a:lstStyle/>
+          <a:p>
+            <a:endParaRPr lang="ko-KR" altLang="en-US"/>
+          </a:p>
+        </p:txBody>
       </p:sp>
       <p:sp>
         <p:nvSpPr>
@@ -11203,6 +11635,13 @@
           </a:solidFill>
           <a:ln/>
         </p:spPr>
+        <p:txBody>
+          <a:bodyPr/>
+          <a:lstStyle/>
+          <a:p>
+            <a:endParaRPr lang="ko-KR" altLang="en-US"/>
+          </a:p>
+        </p:txBody>
       </p:sp>
       <p:sp>
         <p:nvSpPr>
@@ -11223,6 +11662,13 @@
           </a:solidFill>
           <a:ln/>
         </p:spPr>
+        <p:txBody>
+          <a:bodyPr/>
+          <a:lstStyle/>
+          <a:p>
+            <a:endParaRPr lang="ko-KR" altLang="en-US"/>
+          </a:p>
+        </p:txBody>
       </p:sp>
       <p:sp>
         <p:nvSpPr>
@@ -11243,6 +11689,13 @@
           </a:solidFill>
           <a:ln/>
         </p:spPr>
+        <p:txBody>
+          <a:bodyPr/>
+          <a:lstStyle/>
+          <a:p>
+            <a:endParaRPr lang="ko-KR" altLang="en-US"/>
+          </a:p>
+        </p:txBody>
       </p:sp>
       <p:sp>
         <p:nvSpPr>
@@ -11270,6 +11723,13 @@
             <a:prstDash val="solid"/>
           </a:ln>
         </p:spPr>
+        <p:txBody>
+          <a:bodyPr/>
+          <a:lstStyle/>
+          <a:p>
+            <a:endParaRPr lang="ko-KR" altLang="en-US"/>
+          </a:p>
+        </p:txBody>
       </p:sp>
       <p:sp>
         <p:nvSpPr>
@@ -11290,6 +11750,13 @@
           </a:solidFill>
           <a:ln/>
         </p:spPr>
+        <p:txBody>
+          <a:bodyPr/>
+          <a:lstStyle/>
+          <a:p>
+            <a:endParaRPr lang="ko-KR" altLang="en-US"/>
+          </a:p>
+        </p:txBody>
       </p:sp>
       <p:sp>
         <p:nvSpPr>
@@ -11310,6 +11777,13 @@
           </a:solidFill>
           <a:ln/>
         </p:spPr>
+        <p:txBody>
+          <a:bodyPr/>
+          <a:lstStyle/>
+          <a:p>
+            <a:endParaRPr lang="ko-KR" altLang="en-US"/>
+          </a:p>
+        </p:txBody>
       </p:sp>
       <p:sp>
         <p:nvSpPr>
@@ -11330,6 +11804,13 @@
           </a:solidFill>
           <a:ln/>
         </p:spPr>
+        <p:txBody>
+          <a:bodyPr/>
+          <a:lstStyle/>
+          <a:p>
+            <a:endParaRPr lang="ko-KR" altLang="en-US"/>
+          </a:p>
+        </p:txBody>
       </p:sp>
       <p:sp>
         <p:nvSpPr>
@@ -11395,7 +11876,7 @@
               <a:buNone/>
             </a:pPr>
             <a:r>
-              <a:rPr lang="en-US" sz="900" dirty="0" smtClean="0">
+              <a:rPr lang="en-US" sz="900" dirty="0">
                 <a:solidFill>
                   <a:srgbClr val="6E6690"/>
                 </a:solidFill>
@@ -11536,15 +12017,7 @@
           <a:p>
             <a:r>
               <a:rPr lang="ko-KR" altLang="en-US" sz="1400" dirty="0"/>
-              <a:t>사용자 </a:t>
-            </a:r>
-            <a:r>
-              <a:rPr lang="ko-KR" altLang="en-US" sz="1400" dirty="0" smtClean="0"/>
-              <a:t>이름을 </a:t>
-            </a:r>
-            <a:r>
-              <a:rPr lang="ko-KR" altLang="en-US" sz="1400" dirty="0"/>
-              <a:t>입력하고 콘솔 </a:t>
+              <a:t>사용자 이름을 입력하고 콘솔 </a:t>
             </a:r>
             <a:r>
               <a:rPr lang="ko-KR" altLang="en-US" sz="1400" dirty="0" err="1"/>
@@ -11653,6 +12126,13 @@
           </a:solidFill>
           <a:ln/>
         </p:spPr>
+        <p:txBody>
+          <a:bodyPr/>
+          <a:lstStyle/>
+          <a:p>
+            <a:endParaRPr lang="ko-KR" altLang="en-US"/>
+          </a:p>
+        </p:txBody>
       </p:sp>
       <p:sp>
         <p:nvSpPr>
@@ -11792,6 +12272,13 @@
           </a:solidFill>
           <a:ln/>
         </p:spPr>
+        <p:txBody>
+          <a:bodyPr/>
+          <a:lstStyle/>
+          <a:p>
+            <a:endParaRPr lang="ko-KR" altLang="en-US"/>
+          </a:p>
+        </p:txBody>
       </p:sp>
       <p:sp>
         <p:nvSpPr>
@@ -11982,6 +12469,13 @@
           </a:solidFill>
           <a:ln/>
         </p:spPr>
+        <p:txBody>
+          <a:bodyPr/>
+          <a:lstStyle/>
+          <a:p>
+            <a:endParaRPr lang="ko-KR" altLang="en-US"/>
+          </a:p>
+        </p:txBody>
       </p:sp>
       <p:sp>
         <p:nvSpPr>
@@ -12254,7 +12748,7 @@
               <a:buNone/>
             </a:pPr>
             <a:r>
-              <a:rPr lang="en-US" sz="900" dirty="0" smtClean="0">
+              <a:rPr lang="en-US" sz="900" dirty="0">
                 <a:solidFill>
                   <a:srgbClr val="6E6690"/>
                 </a:solidFill>
@@ -12422,6 +12916,13 @@
           </a:solidFill>
           <a:ln/>
         </p:spPr>
+        <p:txBody>
+          <a:bodyPr/>
+          <a:lstStyle/>
+          <a:p>
+            <a:endParaRPr lang="ko-KR" altLang="en-US"/>
+          </a:p>
+        </p:txBody>
       </p:sp>
       <p:sp>
         <p:nvSpPr>
@@ -12760,7 +13261,7 @@
               <a:buNone/>
             </a:pPr>
             <a:r>
-              <a:rPr lang="en-US" sz="900" dirty="0" smtClean="0">
+              <a:rPr lang="en-US" sz="900" dirty="0">
                 <a:solidFill>
                   <a:srgbClr val="9991B8"/>
                 </a:solidFill>
@@ -12828,6 +13329,13 @@
           </a:solidFill>
           <a:ln/>
         </p:spPr>
+        <p:txBody>
+          <a:bodyPr/>
+          <a:lstStyle/>
+          <a:p>
+            <a:endParaRPr lang="ko-KR" altLang="en-US"/>
+          </a:p>
+        </p:txBody>
       </p:sp>
       <p:sp>
         <p:nvSpPr>
@@ -12970,6 +13478,13 @@
           </a:solidFill>
           <a:ln/>
         </p:spPr>
+        <p:txBody>
+          <a:bodyPr/>
+          <a:lstStyle/>
+          <a:p>
+            <a:endParaRPr lang="ko-KR" altLang="en-US"/>
+          </a:p>
+        </p:txBody>
       </p:sp>
       <p:sp>
         <p:nvSpPr>
@@ -13073,6 +13588,13 @@
           </a:solidFill>
           <a:ln/>
         </p:spPr>
+        <p:txBody>
+          <a:bodyPr/>
+          <a:lstStyle/>
+          <a:p>
+            <a:endParaRPr lang="ko-KR" altLang="en-US"/>
+          </a:p>
+        </p:txBody>
       </p:sp>
       <p:sp>
         <p:nvSpPr>
@@ -13173,14 +13695,6 @@
               </a:rPr>
               <a:t> </a:t>
             </a:r>
-            <a:endParaRPr lang="en-US" sz="1100" dirty="0" smtClean="0">
-              <a:solidFill>
-                <a:srgbClr val="1C1633"/>
-              </a:solidFill>
-              <a:latin typeface="맑은 고딕" pitchFamily="34" charset="0"/>
-              <a:ea typeface="맑은 고딕" pitchFamily="34" charset="-122"/>
-              <a:cs typeface="맑은 고딕" pitchFamily="34" charset="-120"/>
-            </a:endParaRPr>
           </a:p>
           <a:p>
             <a:pPr marL="0" indent="0">
@@ -13198,40 +13712,7 @@
                 <a:ea typeface="맑은 고딕" pitchFamily="34" charset="-122"/>
                 <a:cs typeface="맑은 고딕" pitchFamily="34" charset="-120"/>
               </a:rPr>
-              <a:t> </a:t>
-            </a:r>
-            <a:r>
-              <a:rPr lang="en-US" sz="1100" dirty="0" smtClean="0">
-                <a:solidFill>
-                  <a:srgbClr val="1C1633"/>
-                </a:solidFill>
-                <a:latin typeface="맑은 고딕" pitchFamily="34" charset="0"/>
-                <a:ea typeface="맑은 고딕" pitchFamily="34" charset="-122"/>
-                <a:cs typeface="맑은 고딕" pitchFamily="34" charset="-120"/>
-              </a:rPr>
-              <a:t> </a:t>
-            </a:r>
-            <a:r>
-              <a:rPr lang="en-US" sz="1100" dirty="0" smtClean="0">
-                <a:solidFill>
-                  <a:srgbClr val="1C1633"/>
-                </a:solidFill>
-                <a:latin typeface="맑은 고딕" pitchFamily="34" charset="0"/>
-                <a:ea typeface="맑은 고딕" pitchFamily="34" charset="-122"/>
-                <a:cs typeface="맑은 고딕" pitchFamily="34" charset="-120"/>
-              </a:rPr>
-              <a:t>— </a:t>
-            </a:r>
-            <a:r>
-              <a:rPr lang="en-US" sz="1100" dirty="0">
-                <a:solidFill>
-                  <a:srgbClr val="1C1633"/>
-                </a:solidFill>
-                <a:latin typeface="맑은 고딕" pitchFamily="34" charset="0"/>
-                <a:ea typeface="맑은 고딕" pitchFamily="34" charset="-122"/>
-                <a:cs typeface="맑은 고딕" pitchFamily="34" charset="-120"/>
-              </a:rPr>
-              <a:t>초기 투자 비용 없음</a:t>
+              <a:t>  — 초기 투자 비용 없음</a:t>
             </a:r>
             <a:endParaRPr lang="en-US" sz="1100" dirty="0"/>
           </a:p>
@@ -13258,6 +13739,13 @@
           </a:solidFill>
           <a:ln/>
         </p:spPr>
+        <p:txBody>
+          <a:bodyPr/>
+          <a:lstStyle/>
+          <a:p>
+            <a:endParaRPr lang="ko-KR" altLang="en-US"/>
+          </a:p>
+        </p:txBody>
       </p:sp>
       <p:sp>
         <p:nvSpPr>
@@ -13393,6 +13881,13 @@
           </a:solidFill>
           <a:ln/>
         </p:spPr>
+        <p:txBody>
+          <a:bodyPr/>
+          <a:lstStyle/>
+          <a:p>
+            <a:endParaRPr lang="ko-KR" altLang="en-US"/>
+          </a:p>
+        </p:txBody>
       </p:sp>
       <p:sp>
         <p:nvSpPr>
@@ -13466,7 +13961,7 @@
               <a:t> </a:t>
             </a:r>
             <a:r>
-              <a:rPr lang="en-US" sz="1250" dirty="0" err="1" smtClean="0">
+              <a:rPr lang="en-US" sz="1250" dirty="0" err="1">
                 <a:solidFill>
                   <a:srgbClr val="D9D3EE"/>
                 </a:solidFill>
@@ -13477,7 +13972,7 @@
               <a:t>않고</a:t>
             </a:r>
             <a:r>
-              <a:rPr lang="en-US" sz="1250" dirty="0" smtClean="0">
+              <a:rPr lang="en-US" sz="1250" dirty="0">
                 <a:solidFill>
                   <a:srgbClr val="D9D3EE"/>
                 </a:solidFill>
@@ -13488,7 +13983,7 @@
               <a:t>, </a:t>
             </a:r>
             <a:r>
-              <a:rPr lang="en-US" sz="1250" dirty="0" err="1" smtClean="0">
+              <a:rPr lang="en-US" sz="1250" dirty="0" err="1">
                 <a:solidFill>
                   <a:srgbClr val="D9D3EE"/>
                 </a:solidFill>
@@ -13499,7 +13994,7 @@
               <a:t>전력회사</a:t>
             </a:r>
             <a:r>
-              <a:rPr lang="ko-KR" altLang="en-US" sz="1250" dirty="0" smtClean="0">
+              <a:rPr lang="ko-KR" altLang="en-US" sz="1250" dirty="0">
                 <a:solidFill>
                   <a:srgbClr val="D9D3EE"/>
                 </a:solidFill>
@@ -13510,7 +14005,7 @@
               <a:t>로부터 전기를</a:t>
             </a:r>
             <a:r>
-              <a:rPr lang="en-US" sz="1250" dirty="0" smtClean="0">
+              <a:rPr lang="en-US" sz="1250" dirty="0">
                 <a:solidFill>
                   <a:srgbClr val="D9D3EE"/>
                 </a:solidFill>
@@ -13518,18 +14013,7 @@
                 <a:ea typeface="맑은 고딕" pitchFamily="34" charset="-122"/>
                 <a:cs typeface="맑은 고딕" pitchFamily="34" charset="-120"/>
               </a:rPr>
-              <a:t> </a:t>
-            </a:r>
-            <a:r>
-              <a:rPr lang="en-US" sz="1250" dirty="0">
-                <a:solidFill>
-                  <a:srgbClr val="D9D3EE"/>
-                </a:solidFill>
-                <a:latin typeface="맑은 고딕" pitchFamily="34" charset="0"/>
-                <a:ea typeface="맑은 고딕" pitchFamily="34" charset="-122"/>
-                <a:cs typeface="맑은 고딕" pitchFamily="34" charset="-120"/>
-              </a:rPr>
-              <a:t>쓴 만큼 요금을 내는 것과 같습니다 — 서버를 직접 사서 관리하는 대신, AWS 같은 클라우드 사업자의 인프라를 빌려서 쓰는 것이 클라우드 컴퓨팅입니다.</a:t>
+              <a:t> 쓴 만큼 요금을 내는 것과 같습니다 — 서버를 직접 사서 관리하는 대신, AWS 같은 클라우드 사업자의 인프라를 빌려서 쓰는 것이 클라우드 컴퓨팅입니다.</a:t>
             </a:r>
             <a:endParaRPr lang="en-US" sz="1250" dirty="0"/>
           </a:p>
@@ -13671,18 +14155,7 @@
                 <a:ea typeface="Cambria" pitchFamily="34" charset="-122"/>
                 <a:cs typeface="Cambria" pitchFamily="34" charset="-120"/>
               </a:rPr>
-              <a:t>On-Premise vs </a:t>
-            </a:r>
-            <a:r>
-              <a:rPr lang="en-US" sz="3400" b="1" dirty="0" smtClean="0">
-                <a:solidFill>
-                  <a:srgbClr val="21295C"/>
-                </a:solidFill>
-                <a:latin typeface="Cambria" pitchFamily="34" charset="0"/>
-                <a:ea typeface="Cambria" pitchFamily="34" charset="-122"/>
-                <a:cs typeface="Cambria" pitchFamily="34" charset="-120"/>
-              </a:rPr>
-              <a:t>Cloud Computing</a:t>
+              <a:t>On-Premise vs Cloud Computing</a:t>
             </a:r>
             <a:endParaRPr lang="en-US" sz="3400" dirty="0"/>
           </a:p>
@@ -13746,7 +14219,7 @@
               <a:t> </a:t>
             </a:r>
             <a:r>
-              <a:rPr lang="en-US" sz="1400" i="1" dirty="0" err="1" smtClean="0">
+              <a:rPr lang="en-US" sz="1400" i="1" dirty="0" err="1">
                 <a:solidFill>
                   <a:srgbClr val="5B6B79"/>
                 </a:solidFill>
@@ -13757,7 +14230,7 @@
               <a:t>전력회사에서</a:t>
             </a:r>
             <a:r>
-              <a:rPr lang="en-US" sz="1400" i="1" dirty="0" smtClean="0">
+              <a:rPr lang="en-US" sz="1400" i="1" dirty="0">
                 <a:solidFill>
                   <a:srgbClr val="5B6B79"/>
                 </a:solidFill>
@@ -13765,18 +14238,7 @@
                 <a:ea typeface="Calibri" pitchFamily="34" charset="-122"/>
                 <a:cs typeface="Calibri" pitchFamily="34" charset="-120"/>
               </a:rPr>
-              <a:t> </a:t>
-            </a:r>
-            <a:r>
-              <a:rPr lang="en-US" sz="1400" i="1" dirty="0">
-                <a:solidFill>
-                  <a:srgbClr val="5B6B79"/>
-                </a:solidFill>
-                <a:latin typeface="Calibri" pitchFamily="34" charset="0"/>
-                <a:ea typeface="Calibri" pitchFamily="34" charset="-122"/>
-                <a:cs typeface="Calibri" pitchFamily="34" charset="-120"/>
-              </a:rPr>
-              <a:t>전기를 쓴 만큼 요금을 내는 것과 같습니다</a:t>
+              <a:t> 전기를 쓴 만큼 요금을 내는 것과 같습니다</a:t>
             </a:r>
             <a:endParaRPr lang="en-US" sz="1400" dirty="0"/>
           </a:p>
@@ -13810,6 +14272,13 @@
             </a:outerShdw>
           </a:effectLst>
         </p:spPr>
+        <p:txBody>
+          <a:bodyPr/>
+          <a:lstStyle/>
+          <a:p>
+            <a:endParaRPr lang="ko-KR" altLang="en-US"/>
+          </a:p>
+        </p:txBody>
       </p:sp>
       <p:sp>
         <p:nvSpPr>
@@ -13839,6 +14308,13 @@
             </a:outerShdw>
           </a:effectLst>
         </p:spPr>
+        <p:txBody>
+          <a:bodyPr/>
+          <a:lstStyle/>
+          <a:p>
+            <a:endParaRPr lang="ko-KR" altLang="en-US"/>
+          </a:p>
+        </p:txBody>
       </p:sp>
       <p:sp>
         <p:nvSpPr>
@@ -13866,6 +14342,13 @@
             </a:outerShdw>
           </a:effectLst>
         </p:spPr>
+        <p:txBody>
+          <a:bodyPr/>
+          <a:lstStyle/>
+          <a:p>
+            <a:endParaRPr lang="ko-KR" altLang="en-US"/>
+          </a:p>
+        </p:txBody>
       </p:sp>
       <p:sp>
         <p:nvSpPr>
@@ -13952,6 +14435,13 @@
             <a:prstDash val="solid"/>
           </a:ln>
         </p:spPr>
+        <p:txBody>
+          <a:bodyPr/>
+          <a:lstStyle/>
+          <a:p>
+            <a:endParaRPr lang="ko-KR" altLang="en-US"/>
+          </a:p>
+        </p:txBody>
       </p:sp>
       <p:pic>
         <p:nvPicPr>
@@ -14047,6 +14537,13 @@
             <a:prstDash val="solid"/>
           </a:ln>
         </p:spPr>
+        <p:txBody>
+          <a:bodyPr/>
+          <a:lstStyle/>
+          <a:p>
+            <a:endParaRPr lang="ko-KR" altLang="en-US"/>
+          </a:p>
+        </p:txBody>
       </p:sp>
       <p:pic>
         <p:nvPicPr>
@@ -14271,6 +14768,13 @@
           </a:solidFill>
           <a:ln/>
         </p:spPr>
+        <p:txBody>
+          <a:bodyPr/>
+          <a:lstStyle/>
+          <a:p>
+            <a:endParaRPr lang="ko-KR" altLang="en-US"/>
+          </a:p>
+        </p:txBody>
       </p:sp>
       <p:pic>
         <p:nvPicPr>
@@ -14354,6 +14858,13 @@
           </a:solidFill>
           <a:ln/>
         </p:spPr>
+        <p:txBody>
+          <a:bodyPr/>
+          <a:lstStyle/>
+          <a:p>
+            <a:endParaRPr lang="ko-KR" altLang="en-US"/>
+          </a:p>
+        </p:txBody>
       </p:sp>
       <p:pic>
         <p:nvPicPr>
@@ -14437,6 +14948,13 @@
           </a:solidFill>
           <a:ln/>
         </p:spPr>
+        <p:txBody>
+          <a:bodyPr/>
+          <a:lstStyle/>
+          <a:p>
+            <a:endParaRPr lang="ko-KR" altLang="en-US"/>
+          </a:p>
+        </p:txBody>
       </p:sp>
       <p:pic>
         <p:nvPicPr>
@@ -14520,6 +15038,13 @@
           </a:solidFill>
           <a:ln/>
         </p:spPr>
+        <p:txBody>
+          <a:bodyPr/>
+          <a:lstStyle/>
+          <a:p>
+            <a:endParaRPr lang="ko-KR" altLang="en-US"/>
+          </a:p>
+        </p:txBody>
       </p:sp>
       <p:pic>
         <p:nvPicPr>
@@ -14603,6 +15128,13 @@
           </a:solidFill>
           <a:ln/>
         </p:spPr>
+        <p:txBody>
+          <a:bodyPr/>
+          <a:lstStyle/>
+          <a:p>
+            <a:endParaRPr lang="ko-KR" altLang="en-US"/>
+          </a:p>
+        </p:txBody>
       </p:sp>
       <p:pic>
         <p:nvPicPr>
@@ -14686,6 +15218,13 @@
           </a:solidFill>
           <a:ln/>
         </p:spPr>
+        <p:txBody>
+          <a:bodyPr/>
+          <a:lstStyle/>
+          <a:p>
+            <a:endParaRPr lang="ko-KR" altLang="en-US"/>
+          </a:p>
+        </p:txBody>
       </p:sp>
       <p:pic>
         <p:nvPicPr>
@@ -14771,6 +15310,13 @@
           </a:solidFill>
           <a:ln/>
         </p:spPr>
+        <p:txBody>
+          <a:bodyPr/>
+          <a:lstStyle/>
+          <a:p>
+            <a:endParaRPr lang="ko-KR" altLang="en-US"/>
+          </a:p>
+        </p:txBody>
       </p:sp>
       <p:sp>
         <p:nvSpPr>
@@ -14836,10 +15382,9 @@
               <a:buNone/>
             </a:pPr>
             <a:r>
-              <a:rPr lang="en-US" sz="900" dirty="0" smtClean="0"/>
+              <a:rPr lang="en-US" sz="900" dirty="0"/>
               <a:t>4</a:t>
             </a:r>
-            <a:endParaRPr lang="en-US" sz="900" dirty="0"/>
           </a:p>
         </p:txBody>
       </p:sp>
@@ -14902,6 +15447,13 @@
           </a:solidFill>
           <a:ln/>
         </p:spPr>
+        <p:txBody>
+          <a:bodyPr/>
+          <a:lstStyle/>
+          <a:p>
+            <a:endParaRPr lang="ko-KR" altLang="en-US"/>
+          </a:p>
+        </p:txBody>
       </p:sp>
       <p:sp>
         <p:nvSpPr>
@@ -15041,6 +15593,13 @@
           </a:solidFill>
           <a:ln/>
         </p:spPr>
+        <p:txBody>
+          <a:bodyPr/>
+          <a:lstStyle/>
+          <a:p>
+            <a:endParaRPr lang="ko-KR" altLang="en-US"/>
+          </a:p>
+        </p:txBody>
       </p:sp>
       <p:sp>
         <p:nvSpPr>
@@ -15183,6 +15742,13 @@
           </a:solidFill>
           <a:ln/>
         </p:spPr>
+        <p:txBody>
+          <a:bodyPr/>
+          <a:lstStyle/>
+          <a:p>
+            <a:endParaRPr lang="ko-KR" altLang="en-US"/>
+          </a:p>
+        </p:txBody>
       </p:sp>
       <p:sp>
         <p:nvSpPr>
@@ -15325,6 +15891,13 @@
           </a:solidFill>
           <a:ln/>
         </p:spPr>
+        <p:txBody>
+          <a:bodyPr/>
+          <a:lstStyle/>
+          <a:p>
+            <a:endParaRPr lang="ko-KR" altLang="en-US"/>
+          </a:p>
+        </p:txBody>
       </p:sp>
       <p:sp>
         <p:nvSpPr>
@@ -15467,6 +16040,13 @@
           </a:solidFill>
           <a:ln/>
         </p:spPr>
+        <p:txBody>
+          <a:bodyPr/>
+          <a:lstStyle/>
+          <a:p>
+            <a:endParaRPr lang="ko-KR" altLang="en-US"/>
+          </a:p>
+        </p:txBody>
       </p:sp>
       <p:sp>
         <p:nvSpPr>
@@ -15573,7 +16153,7 @@
               </a:lnSpc>
             </a:pPr>
             <a:r>
-              <a:rPr lang="ko-KR" altLang="en-US" sz="1100" dirty="0" smtClean="0">
+              <a:rPr lang="ko-KR" altLang="en-US" sz="1100" dirty="0">
                 <a:solidFill>
                   <a:srgbClr val="1C1633"/>
                 </a:solidFill>
@@ -15581,7 +16161,18 @@
                 <a:ea typeface="맑은 고딕" pitchFamily="34" charset="-122"/>
                 <a:cs typeface="맑은 고딕" pitchFamily="34" charset="-120"/>
               </a:rPr>
-              <a:t>장애에 </a:t>
+              <a:t>장애에 강한</a:t>
+            </a:r>
+            <a:r>
+              <a:rPr lang="en-US" altLang="ko-KR" sz="1100" dirty="0">
+                <a:solidFill>
+                  <a:srgbClr val="1C1633"/>
+                </a:solidFill>
+                <a:latin typeface="맑은 고딕" pitchFamily="34" charset="0"/>
+                <a:ea typeface="맑은 고딕" pitchFamily="34" charset="-122"/>
+                <a:cs typeface="맑은 고딕" pitchFamily="34" charset="-120"/>
+              </a:rPr>
+              <a:t>(fault resilient) </a:t>
             </a:r>
             <a:r>
               <a:rPr lang="ko-KR" altLang="en-US" sz="1100" dirty="0">
@@ -15592,7 +16183,7 @@
                 <a:ea typeface="맑은 고딕" pitchFamily="34" charset="-122"/>
                 <a:cs typeface="맑은 고딕" pitchFamily="34" charset="-120"/>
               </a:rPr>
-              <a:t>강한</a:t>
+              <a:t>구조로 설계</a:t>
             </a:r>
             <a:r>
               <a:rPr lang="en-US" altLang="ko-KR" sz="1100" dirty="0">
@@ -15603,7 +16194,7 @@
                 <a:ea typeface="맑은 고딕" pitchFamily="34" charset="-122"/>
                 <a:cs typeface="맑은 고딕" pitchFamily="34" charset="-120"/>
               </a:rPr>
-              <a:t>(fault resilient) </a:t>
+              <a:t>. </a:t>
             </a:r>
             <a:r>
               <a:rPr lang="ko-KR" altLang="en-US" sz="1100" dirty="0">
@@ -15614,10 +16205,10 @@
                 <a:ea typeface="맑은 고딕" pitchFamily="34" charset="-122"/>
                 <a:cs typeface="맑은 고딕" pitchFamily="34" charset="-120"/>
               </a:rPr>
-              <a:t>구조로 </a:t>
-            </a:r>
-            <a:r>
-              <a:rPr lang="ko-KR" altLang="en-US" sz="1100" dirty="0" smtClean="0">
+              <a:t>시</a:t>
+            </a:r>
+            <a:r>
+              <a:rPr lang="en-US" sz="1100" dirty="0" err="1">
                 <a:solidFill>
                   <a:srgbClr val="1C1633"/>
                 </a:solidFill>
@@ -15625,10 +16216,10 @@
                 <a:ea typeface="맑은 고딕" pitchFamily="34" charset="-122"/>
                 <a:cs typeface="맑은 고딕" pitchFamily="34" charset="-120"/>
               </a:rPr>
-              <a:t>설계</a:t>
-            </a:r>
-            <a:r>
-              <a:rPr lang="en-US" altLang="ko-KR" sz="1100" dirty="0" smtClean="0">
+              <a:t>스템의</a:t>
+            </a:r>
+            <a:r>
+              <a:rPr lang="en-US" sz="1100" dirty="0">
                 <a:solidFill>
                   <a:srgbClr val="1C1633"/>
                 </a:solidFill>
@@ -15636,51 +16227,7 @@
                 <a:ea typeface="맑은 고딕" pitchFamily="34" charset="-122"/>
                 <a:cs typeface="맑은 고딕" pitchFamily="34" charset="-120"/>
               </a:rPr>
-              <a:t>. </a:t>
-            </a:r>
-            <a:r>
-              <a:rPr lang="ko-KR" altLang="en-US" sz="1100" dirty="0" smtClean="0">
-                <a:solidFill>
-                  <a:srgbClr val="1C1633"/>
-                </a:solidFill>
-                <a:latin typeface="맑은 고딕" pitchFamily="34" charset="0"/>
-                <a:ea typeface="맑은 고딕" pitchFamily="34" charset="-122"/>
-                <a:cs typeface="맑은 고딕" pitchFamily="34" charset="-120"/>
-              </a:rPr>
-              <a:t>시</a:t>
-            </a:r>
-            <a:r>
-              <a:rPr lang="en-US" sz="1100" dirty="0" err="1" smtClean="0">
-                <a:solidFill>
-                  <a:srgbClr val="1C1633"/>
-                </a:solidFill>
-                <a:latin typeface="맑은 고딕" pitchFamily="34" charset="0"/>
-                <a:ea typeface="맑은 고딕" pitchFamily="34" charset="-122"/>
-                <a:cs typeface="맑은 고딕" pitchFamily="34" charset="-120"/>
-              </a:rPr>
-              <a:t>스템의</a:t>
-            </a:r>
-            <a:r>
-              <a:rPr lang="en-US" sz="1100" dirty="0" smtClean="0">
-                <a:solidFill>
-                  <a:srgbClr val="1C1633"/>
-                </a:solidFill>
-                <a:latin typeface="맑은 고딕" pitchFamily="34" charset="0"/>
-                <a:ea typeface="맑은 고딕" pitchFamily="34" charset="-122"/>
-                <a:cs typeface="맑은 고딕" pitchFamily="34" charset="-120"/>
-              </a:rPr>
-              <a:t> </a:t>
-            </a:r>
-            <a:r>
-              <a:rPr lang="en-US" sz="1100" dirty="0">
-                <a:solidFill>
-                  <a:srgbClr val="1C1633"/>
-                </a:solidFill>
-                <a:latin typeface="맑은 고딕" pitchFamily="34" charset="0"/>
-                <a:ea typeface="맑은 고딕" pitchFamily="34" charset="-122"/>
-                <a:cs typeface="맑은 고딕" pitchFamily="34" charset="-120"/>
-              </a:rPr>
-              <a:t>안정성을 높이는 동시에, 정보를 항상 이용 가능한 상태로 유지</a:t>
+              <a:t> 안정성을 높이는 동시에, 정보를 항상 이용 가능한 상태로 유지</a:t>
             </a:r>
             <a:endParaRPr lang="en-US" sz="1100" dirty="0"/>
           </a:p>
@@ -15817,6 +16364,13 @@
           </a:solidFill>
           <a:ln/>
         </p:spPr>
+        <p:txBody>
+          <a:bodyPr/>
+          <a:lstStyle/>
+          <a:p>
+            <a:endParaRPr lang="ko-KR" altLang="en-US"/>
+          </a:p>
+        </p:txBody>
       </p:sp>
       <p:sp>
         <p:nvSpPr>
@@ -15956,6 +16510,13 @@
           </a:solidFill>
           <a:ln/>
         </p:spPr>
+        <p:txBody>
+          <a:bodyPr/>
+          <a:lstStyle/>
+          <a:p>
+            <a:endParaRPr lang="ko-KR" altLang="en-US"/>
+          </a:p>
+        </p:txBody>
       </p:sp>
       <p:sp>
         <p:nvSpPr>
@@ -16056,6 +16617,13 @@
           </a:solidFill>
           <a:ln/>
         </p:spPr>
+        <p:txBody>
+          <a:bodyPr/>
+          <a:lstStyle/>
+          <a:p>
+            <a:endParaRPr lang="ko-KR" altLang="en-US"/>
+          </a:p>
+        </p:txBody>
       </p:sp>
       <p:sp>
         <p:nvSpPr>
@@ -16156,6 +16724,13 @@
           </a:solidFill>
           <a:ln/>
         </p:spPr>
+        <p:txBody>
+          <a:bodyPr/>
+          <a:lstStyle/>
+          <a:p>
+            <a:endParaRPr lang="ko-KR" altLang="en-US"/>
+          </a:p>
+        </p:txBody>
       </p:sp>
       <p:sp>
         <p:nvSpPr>
@@ -16295,6 +16870,13 @@
           </a:solidFill>
           <a:ln/>
         </p:spPr>
+        <p:txBody>
+          <a:bodyPr/>
+          <a:lstStyle/>
+          <a:p>
+            <a:endParaRPr lang="ko-KR" altLang="en-US"/>
+          </a:p>
+        </p:txBody>
       </p:sp>
       <p:sp>
         <p:nvSpPr>
@@ -16463,10 +17045,9 @@
               <a:buNone/>
             </a:pPr>
             <a:r>
-              <a:rPr lang="en-US" sz="900" dirty="0" smtClean="0"/>
+              <a:rPr lang="en-US" sz="900" dirty="0"/>
               <a:t>6</a:t>
             </a:r>
-            <a:endParaRPr lang="en-US" sz="900" dirty="0"/>
           </a:p>
         </p:txBody>
       </p:sp>
@@ -16684,7 +17265,7 @@
               <a:buNone/>
             </a:pPr>
             <a:r>
-              <a:rPr lang="en-US" sz="900" dirty="0" smtClean="0">
+              <a:rPr lang="en-US" sz="900" dirty="0">
                 <a:solidFill>
                   <a:srgbClr val="9991B8"/>
                 </a:solidFill>
@@ -16744,6 +17325,13 @@
           </a:solidFill>
           <a:ln/>
         </p:spPr>
+        <p:txBody>
+          <a:bodyPr/>
+          <a:lstStyle/>
+          <a:p>
+            <a:endParaRPr lang="ko-KR" altLang="en-US"/>
+          </a:p>
+        </p:txBody>
       </p:sp>
       <p:sp>
         <p:nvSpPr>
@@ -16883,6 +17471,13 @@
           </a:solidFill>
           <a:ln/>
         </p:spPr>
+        <p:txBody>
+          <a:bodyPr/>
+          <a:lstStyle/>
+          <a:p>
+            <a:endParaRPr lang="ko-KR" altLang="en-US"/>
+          </a:p>
+        </p:txBody>
       </p:sp>
       <p:sp>
         <p:nvSpPr>
@@ -16903,6 +17498,13 @@
           </a:solidFill>
           <a:ln/>
         </p:spPr>
+        <p:txBody>
+          <a:bodyPr/>
+          <a:lstStyle/>
+          <a:p>
+            <a:endParaRPr lang="ko-KR" altLang="en-US"/>
+          </a:p>
+        </p:txBody>
       </p:sp>
       <p:sp>
         <p:nvSpPr>
@@ -17048,6 +17650,13 @@
           </a:solidFill>
           <a:ln/>
         </p:spPr>
+        <p:txBody>
+          <a:bodyPr/>
+          <a:lstStyle/>
+          <a:p>
+            <a:endParaRPr lang="ko-KR" altLang="en-US"/>
+          </a:p>
+        </p:txBody>
       </p:sp>
       <p:sp>
         <p:nvSpPr>
@@ -17068,6 +17677,13 @@
           </a:solidFill>
           <a:ln/>
         </p:spPr>
+        <p:txBody>
+          <a:bodyPr/>
+          <a:lstStyle/>
+          <a:p>
+            <a:endParaRPr lang="ko-KR" altLang="en-US"/>
+          </a:p>
+        </p:txBody>
       </p:sp>
       <p:sp>
         <p:nvSpPr>
@@ -17213,6 +17829,13 @@
           </a:solidFill>
           <a:ln/>
         </p:spPr>
+        <p:txBody>
+          <a:bodyPr/>
+          <a:lstStyle/>
+          <a:p>
+            <a:endParaRPr lang="ko-KR" altLang="en-US"/>
+          </a:p>
+        </p:txBody>
       </p:sp>
       <p:sp>
         <p:nvSpPr>
@@ -17233,6 +17856,13 @@
           </a:solidFill>
           <a:ln/>
         </p:spPr>
+        <p:txBody>
+          <a:bodyPr/>
+          <a:lstStyle/>
+          <a:p>
+            <a:endParaRPr lang="ko-KR" altLang="en-US"/>
+          </a:p>
+        </p:txBody>
       </p:sp>
       <p:sp>
         <p:nvSpPr>
@@ -17259,7 +17889,7 @@
               <a:buNone/>
             </a:pPr>
             <a:r>
-              <a:rPr lang="en-US" sz="1400" b="1" dirty="0" smtClean="0">
+              <a:rPr lang="en-US" sz="1400" b="1" dirty="0">
                 <a:solidFill>
                   <a:srgbClr val="FFFFFF"/>
                 </a:solidFill>
@@ -17378,6 +18008,13 @@
           </a:solidFill>
           <a:ln/>
         </p:spPr>
+        <p:txBody>
+          <a:bodyPr/>
+          <a:lstStyle/>
+          <a:p>
+            <a:endParaRPr lang="ko-KR" altLang="en-US"/>
+          </a:p>
+        </p:txBody>
       </p:sp>
       <p:sp>
         <p:nvSpPr>
@@ -17398,6 +18035,13 @@
           </a:solidFill>
           <a:ln/>
         </p:spPr>
+        <p:txBody>
+          <a:bodyPr/>
+          <a:lstStyle/>
+          <a:p>
+            <a:endParaRPr lang="ko-KR" altLang="en-US"/>
+          </a:p>
+        </p:txBody>
       </p:sp>
       <p:sp>
         <p:nvSpPr>
@@ -17424,7 +18068,7 @@
               <a:buNone/>
             </a:pPr>
             <a:r>
-              <a:rPr lang="en-US" sz="1400" b="1" dirty="0" smtClean="0">
+              <a:rPr lang="en-US" sz="1400" b="1" dirty="0">
                 <a:solidFill>
                   <a:srgbClr val="FFFFFF"/>
                 </a:solidFill>
@@ -17543,6 +18187,13 @@
           </a:solidFill>
           <a:ln/>
         </p:spPr>
+        <p:txBody>
+          <a:bodyPr/>
+          <a:lstStyle/>
+          <a:p>
+            <a:endParaRPr lang="ko-KR" altLang="en-US"/>
+          </a:p>
+        </p:txBody>
       </p:sp>
       <p:sp>
         <p:nvSpPr>
@@ -17563,6 +18214,13 @@
           </a:solidFill>
           <a:ln/>
         </p:spPr>
+        <p:txBody>
+          <a:bodyPr/>
+          <a:lstStyle/>
+          <a:p>
+            <a:endParaRPr lang="ko-KR" altLang="en-US"/>
+          </a:p>
+        </p:txBody>
       </p:sp>
       <p:sp>
         <p:nvSpPr>
@@ -17708,6 +18366,13 @@
           </a:solidFill>
           <a:ln/>
         </p:spPr>
+        <p:txBody>
+          <a:bodyPr/>
+          <a:lstStyle/>
+          <a:p>
+            <a:endParaRPr lang="ko-KR" altLang="en-US"/>
+          </a:p>
+        </p:txBody>
       </p:sp>
       <p:sp>
         <p:nvSpPr>
@@ -17728,6 +18393,13 @@
           </a:solidFill>
           <a:ln/>
         </p:spPr>
+        <p:txBody>
+          <a:bodyPr/>
+          <a:lstStyle/>
+          <a:p>
+            <a:endParaRPr lang="ko-KR" altLang="en-US"/>
+          </a:p>
+        </p:txBody>
       </p:sp>
       <p:sp>
         <p:nvSpPr>
@@ -17873,6 +18545,13 @@
           </a:solidFill>
           <a:ln/>
         </p:spPr>
+        <p:txBody>
+          <a:bodyPr/>
+          <a:lstStyle/>
+          <a:p>
+            <a:endParaRPr lang="ko-KR" altLang="en-US"/>
+          </a:p>
+        </p:txBody>
       </p:sp>
       <p:sp>
         <p:nvSpPr>
@@ -17893,6 +18572,13 @@
           </a:solidFill>
           <a:ln/>
         </p:spPr>
+        <p:txBody>
+          <a:bodyPr/>
+          <a:lstStyle/>
+          <a:p>
+            <a:endParaRPr lang="ko-KR" altLang="en-US"/>
+          </a:p>
+        </p:txBody>
       </p:sp>
       <p:sp>
         <p:nvSpPr>
@@ -18038,6 +18724,13 @@
           </a:solidFill>
           <a:ln/>
         </p:spPr>
+        <p:txBody>
+          <a:bodyPr/>
+          <a:lstStyle/>
+          <a:p>
+            <a:endParaRPr lang="ko-KR" altLang="en-US"/>
+          </a:p>
+        </p:txBody>
       </p:sp>
       <p:sp>
         <p:nvSpPr>
@@ -18058,6 +18751,13 @@
           </a:solidFill>
           <a:ln/>
         </p:spPr>
+        <p:txBody>
+          <a:bodyPr/>
+          <a:lstStyle/>
+          <a:p>
+            <a:endParaRPr lang="ko-KR" altLang="en-US"/>
+          </a:p>
+        </p:txBody>
       </p:sp>
       <p:sp>
         <p:nvSpPr>
@@ -18558,10 +19258,9 @@
               <a:buNone/>
             </a:pPr>
             <a:r>
-              <a:rPr lang="en-US" sz="900" dirty="0" smtClean="0"/>
+              <a:rPr lang="en-US" sz="900" dirty="0"/>
               <a:t>8</a:t>
             </a:r>
-            <a:endParaRPr lang="en-US" sz="900" dirty="0"/>
           </a:p>
         </p:txBody>
       </p:sp>
@@ -18624,6 +19323,13 @@
           </a:solidFill>
           <a:ln/>
         </p:spPr>
+        <p:txBody>
+          <a:bodyPr/>
+          <a:lstStyle/>
+          <a:p>
+            <a:endParaRPr lang="ko-KR" altLang="en-US"/>
+          </a:p>
+        </p:txBody>
       </p:sp>
       <p:sp>
         <p:nvSpPr>
@@ -18683,6 +19389,13 @@
           </a:solidFill>
           <a:ln/>
         </p:spPr>
+        <p:txBody>
+          <a:bodyPr/>
+          <a:lstStyle/>
+          <a:p>
+            <a:endParaRPr lang="ko-KR" altLang="en-US"/>
+          </a:p>
+        </p:txBody>
       </p:sp>
       <p:sp>
         <p:nvSpPr>
@@ -18801,7 +19514,7 @@
               <a:t>AWS </a:t>
             </a:r>
             <a:r>
-              <a:rPr lang="en-US" sz="1250" dirty="0" err="1" smtClean="0">
+              <a:rPr lang="en-US" sz="1250" dirty="0" err="1">
                 <a:solidFill>
                   <a:srgbClr val="1C1633"/>
                 </a:solidFill>
@@ -18812,7 +19525,7 @@
               <a:t>홈페이지</a:t>
             </a:r>
             <a:r>
-              <a:rPr lang="en-US" sz="1250" dirty="0" smtClean="0">
+              <a:rPr lang="en-US" sz="1250" dirty="0">
                 <a:solidFill>
                   <a:srgbClr val="1C1633"/>
                 </a:solidFill>
@@ -18823,7 +19536,7 @@
               <a:t>(aws.amazon.com) </a:t>
             </a:r>
             <a:r>
-              <a:rPr lang="en-US" sz="1250" dirty="0" err="1" smtClean="0">
+              <a:rPr lang="en-US" sz="1250" dirty="0" err="1">
                 <a:solidFill>
                   <a:srgbClr val="1C1633"/>
                 </a:solidFill>
@@ -18834,7 +19547,7 @@
               <a:t>에서</a:t>
             </a:r>
             <a:r>
-              <a:rPr lang="en-US" sz="1250" dirty="0" smtClean="0">
+              <a:rPr lang="en-US" sz="1250" dirty="0">
                 <a:solidFill>
                   <a:srgbClr val="1C1633"/>
                 </a:solidFill>
@@ -18842,7 +19555,18 @@
                 <a:ea typeface="맑은 고딕" pitchFamily="34" charset="-122"/>
                 <a:cs typeface="맑은 고딕" pitchFamily="34" charset="-120"/>
               </a:rPr>
-              <a:t> </a:t>
+              <a:t> '</a:t>
+            </a:r>
+            <a:r>
+              <a:rPr lang="en-US" sz="1250" dirty="0" err="1">
+                <a:solidFill>
+                  <a:srgbClr val="1C1633"/>
+                </a:solidFill>
+                <a:latin typeface="맑은 고딕" pitchFamily="34" charset="0"/>
+                <a:ea typeface="맑은 고딕" pitchFamily="34" charset="-122"/>
+                <a:cs typeface="맑은 고딕" pitchFamily="34" charset="-120"/>
+              </a:rPr>
+              <a:t>무료로</a:t>
             </a:r>
             <a:r>
               <a:rPr lang="en-US" sz="1250" dirty="0">
@@ -18853,7 +19577,7 @@
                 <a:ea typeface="맑은 고딕" pitchFamily="34" charset="-122"/>
                 <a:cs typeface="맑은 고딕" pitchFamily="34" charset="-120"/>
               </a:rPr>
-              <a:t>'</a:t>
+              <a:t> AWS </a:t>
             </a:r>
             <a:r>
               <a:rPr lang="en-US" sz="1250" dirty="0" err="1">
@@ -18864,51 +19588,7 @@
                 <a:ea typeface="맑은 고딕" pitchFamily="34" charset="-122"/>
                 <a:cs typeface="맑은 고딕" pitchFamily="34" charset="-120"/>
               </a:rPr>
-              <a:t>무료로</a:t>
-            </a:r>
-            <a:r>
-              <a:rPr lang="en-US" sz="1250" dirty="0">
-                <a:solidFill>
-                  <a:srgbClr val="1C1633"/>
-                </a:solidFill>
-                <a:latin typeface="맑은 고딕" pitchFamily="34" charset="0"/>
-                <a:ea typeface="맑은 고딕" pitchFamily="34" charset="-122"/>
-                <a:cs typeface="맑은 고딕" pitchFamily="34" charset="-120"/>
-              </a:rPr>
-              <a:t> </a:t>
-            </a:r>
-            <a:r>
-              <a:rPr lang="en-US" sz="1250" dirty="0" smtClean="0">
-                <a:solidFill>
-                  <a:srgbClr val="1C1633"/>
-                </a:solidFill>
-                <a:latin typeface="맑은 고딕" pitchFamily="34" charset="0"/>
-                <a:ea typeface="맑은 고딕" pitchFamily="34" charset="-122"/>
-                <a:cs typeface="맑은 고딕" pitchFamily="34" charset="-120"/>
-              </a:rPr>
-              <a:t>AWS </a:t>
-            </a:r>
-            <a:r>
-              <a:rPr lang="en-US" sz="1250" dirty="0" err="1" smtClean="0">
-                <a:solidFill>
-                  <a:srgbClr val="1C1633"/>
-                </a:solidFill>
-                <a:latin typeface="맑은 고딕" pitchFamily="34" charset="0"/>
-                <a:ea typeface="맑은 고딕" pitchFamily="34" charset="-122"/>
-                <a:cs typeface="맑은 고딕" pitchFamily="34" charset="-120"/>
-              </a:rPr>
-              <a:t>시작하기</a:t>
-            </a:r>
-            <a:r>
-              <a:rPr lang="en-US" sz="1250" dirty="0" err="1">
-                <a:solidFill>
-                  <a:srgbClr val="1C1633"/>
-                </a:solidFill>
-                <a:latin typeface="맑은 고딕" pitchFamily="34" charset="0"/>
-                <a:ea typeface="맑은 고딕" pitchFamily="34" charset="-122"/>
-                <a:cs typeface="맑은 고딕" pitchFamily="34" charset="-120"/>
-              </a:rPr>
-              <a:t>'를</a:t>
+              <a:t>시작하기'를</a:t>
             </a:r>
             <a:r>
               <a:rPr lang="en-US" sz="1250" dirty="0">
@@ -18946,6 +19626,13 @@
           </a:solidFill>
           <a:ln/>
         </p:spPr>
+        <p:txBody>
+          <a:bodyPr/>
+          <a:lstStyle/>
+          <a:p>
+            <a:endParaRPr lang="ko-KR" altLang="en-US"/>
+          </a:p>
+        </p:txBody>
       </p:sp>
       <p:sp>
         <p:nvSpPr>
@@ -19012,6 +19699,13 @@
             <a:prstDash val="solid"/>
           </a:ln>
         </p:spPr>
+        <p:txBody>
+          <a:bodyPr/>
+          <a:lstStyle/>
+          <a:p>
+            <a:endParaRPr lang="ko-KR" altLang="en-US"/>
+          </a:p>
+        </p:txBody>
       </p:sp>
       <p:sp>
         <p:nvSpPr>
@@ -19032,6 +19726,13 @@
           </a:solidFill>
           <a:ln/>
         </p:spPr>
+        <p:txBody>
+          <a:bodyPr/>
+          <a:lstStyle/>
+          <a:p>
+            <a:endParaRPr lang="ko-KR" altLang="en-US"/>
+          </a:p>
+        </p:txBody>
       </p:sp>
       <p:sp>
         <p:nvSpPr>
@@ -19052,6 +19753,13 @@
           </a:solidFill>
           <a:ln/>
         </p:spPr>
+        <p:txBody>
+          <a:bodyPr/>
+          <a:lstStyle/>
+          <a:p>
+            <a:endParaRPr lang="ko-KR" altLang="en-US"/>
+          </a:p>
+        </p:txBody>
       </p:sp>
       <p:sp>
         <p:nvSpPr>
@@ -19072,6 +19780,13 @@
           </a:solidFill>
           <a:ln/>
         </p:spPr>
+        <p:txBody>
+          <a:bodyPr/>
+          <a:lstStyle/>
+          <a:p>
+            <a:endParaRPr lang="ko-KR" altLang="en-US"/>
+          </a:p>
+        </p:txBody>
       </p:sp>
       <p:sp>
         <p:nvSpPr>
@@ -19099,6 +19814,13 @@
             <a:prstDash val="solid"/>
           </a:ln>
         </p:spPr>
+        <p:txBody>
+          <a:bodyPr/>
+          <a:lstStyle/>
+          <a:p>
+            <a:endParaRPr lang="ko-KR" altLang="en-US"/>
+          </a:p>
+        </p:txBody>
       </p:sp>
       <p:sp>
         <p:nvSpPr>
@@ -19119,6 +19841,13 @@
           </a:solidFill>
           <a:ln/>
         </p:spPr>
+        <p:txBody>
+          <a:bodyPr/>
+          <a:lstStyle/>
+          <a:p>
+            <a:endParaRPr lang="ko-KR" altLang="en-US"/>
+          </a:p>
+        </p:txBody>
       </p:sp>
       <p:sp>
         <p:nvSpPr>
@@ -19139,6 +19868,13 @@
           </a:solidFill>
           <a:ln/>
         </p:spPr>
+        <p:txBody>
+          <a:bodyPr/>
+          <a:lstStyle/>
+          <a:p>
+            <a:endParaRPr lang="ko-KR" altLang="en-US"/>
+          </a:p>
+        </p:txBody>
       </p:sp>
       <p:sp>
         <p:nvSpPr>
@@ -19159,6 +19895,13 @@
           </a:solidFill>
           <a:ln/>
         </p:spPr>
+        <p:txBody>
+          <a:bodyPr/>
+          <a:lstStyle/>
+          <a:p>
+            <a:endParaRPr lang="ko-KR" altLang="en-US"/>
+          </a:p>
+        </p:txBody>
       </p:sp>
       <p:sp>
         <p:nvSpPr>
@@ -19224,10 +19967,9 @@
               <a:buNone/>
             </a:pPr>
             <a:r>
-              <a:rPr lang="en-US" sz="900" dirty="0" smtClean="0"/>
+              <a:rPr lang="en-US" sz="900" dirty="0"/>
               <a:t>9</a:t>
             </a:r>
-            <a:endParaRPr lang="en-US" sz="900" dirty="0"/>
           </a:p>
         </p:txBody>
       </p:sp>
